--- a/CSE281/Lecture 11.pptx
+++ b/CSE281/Lecture 11.pptx
@@ -7,17 +7,22 @@
   <p:sldIdLst>
     <p:sldId id="256" r:id="rId2"/>
     <p:sldId id="257" r:id="rId3"/>
-    <p:sldId id="268" r:id="rId4"/>
-    <p:sldId id="258" r:id="rId5"/>
-    <p:sldId id="259" r:id="rId6"/>
-    <p:sldId id="260" r:id="rId7"/>
-    <p:sldId id="261" r:id="rId8"/>
-    <p:sldId id="262" r:id="rId9"/>
-    <p:sldId id="263" r:id="rId10"/>
-    <p:sldId id="264" r:id="rId11"/>
-    <p:sldId id="265" r:id="rId12"/>
-    <p:sldId id="266" r:id="rId13"/>
-    <p:sldId id="267" r:id="rId14"/>
+    <p:sldId id="270" r:id="rId4"/>
+    <p:sldId id="269" r:id="rId5"/>
+    <p:sldId id="271" r:id="rId6"/>
+    <p:sldId id="272" r:id="rId7"/>
+    <p:sldId id="273" r:id="rId8"/>
+    <p:sldId id="268" r:id="rId9"/>
+    <p:sldId id="258" r:id="rId10"/>
+    <p:sldId id="259" r:id="rId11"/>
+    <p:sldId id="260" r:id="rId12"/>
+    <p:sldId id="261" r:id="rId13"/>
+    <p:sldId id="262" r:id="rId14"/>
+    <p:sldId id="263" r:id="rId15"/>
+    <p:sldId id="264" r:id="rId16"/>
+    <p:sldId id="265" r:id="rId17"/>
+    <p:sldId id="266" r:id="rId18"/>
+    <p:sldId id="267" r:id="rId19"/>
   </p:sldIdLst>
   <p:sldSz cx="12192000" cy="6858000"/>
   <p:notesSz cx="6858000" cy="9144000"/>
@@ -198,7 +203,7 @@
           </a:lstStyle>
           <a:p>
             <a:r>
-              <a:rPr lang="en-US" smtClean="0"/>
+              <a:rPr lang="en-US"/>
               <a:t>Click to edit Master title style</a:t>
             </a:r>
             <a:endParaRPr lang="en-US" dirty="0"/>
@@ -265,7 +270,7 @@
           </a:lstStyle>
           <a:p>
             <a:r>
-              <a:rPr lang="en-US" smtClean="0"/>
+              <a:rPr lang="en-US"/>
               <a:t>Click to edit Master subtitle style</a:t>
             </a:r>
             <a:endParaRPr lang="en-US" dirty="0"/>
@@ -294,7 +299,7 @@
           <a:p>
             <a:fld id="{48A87A34-81AB-432B-8DAE-1953F412C126}" type="datetimeFigureOut">
               <a:rPr lang="en-US" dirty="0"/>
-              <a:t>5/25/2025</a:t>
+              <a:t>12/28/2025</a:t>
             </a:fld>
             <a:endParaRPr lang="en-US" dirty="0"/>
           </a:p>
@@ -402,7 +407,7 @@
           </a:lstStyle>
           <a:p>
             <a:r>
-              <a:rPr lang="en-US" smtClean="0"/>
+              <a:rPr lang="en-US"/>
               <a:t>Click to edit Master title style</a:t>
             </a:r>
             <a:endParaRPr lang="en-US" dirty="0"/>
@@ -467,7 +472,7 @@
           </a:lstStyle>
           <a:p>
             <a:r>
-              <a:rPr lang="en-US" smtClean="0"/>
+              <a:rPr lang="en-US"/>
               <a:t>Click icon to add picture</a:t>
             </a:r>
             <a:endParaRPr lang="en-US" dirty="0"/>
@@ -533,7 +538,7 @@
           <a:p>
             <a:pPr lvl="0"/>
             <a:r>
-              <a:rPr lang="en-US" smtClean="0"/>
+              <a:rPr lang="en-US"/>
               <a:t>Edit Master text styles</a:t>
             </a:r>
           </a:p>
@@ -556,7 +561,7 @@
           <a:p>
             <a:fld id="{48A87A34-81AB-432B-8DAE-1953F412C126}" type="datetimeFigureOut">
               <a:rPr lang="en-US" dirty="0"/>
-              <a:t>5/25/2025</a:t>
+              <a:t>12/28/2025</a:t>
             </a:fld>
             <a:endParaRPr lang="en-US" dirty="0"/>
           </a:p>
@@ -684,7 +689,7 @@
           </a:lstStyle>
           <a:p>
             <a:r>
-              <a:rPr lang="en-US" smtClean="0"/>
+              <a:rPr lang="en-US"/>
               <a:t>Click to edit Master title style</a:t>
             </a:r>
             <a:endParaRPr lang="en-US" dirty="0"/>
@@ -750,7 +755,7 @@
           <a:p>
             <a:pPr lvl="0"/>
             <a:r>
-              <a:rPr lang="en-US" smtClean="0"/>
+              <a:rPr lang="en-US"/>
               <a:t>Edit Master text styles</a:t>
             </a:r>
           </a:p>
@@ -783,7 +788,7 @@
             <a:fld id="{48A87A34-81AB-432B-8DAE-1953F412C126}" type="datetimeFigureOut">
               <a:rPr lang="en-US" dirty="0"/>
               <a:pPr/>
-              <a:t>5/25/2025</a:t>
+              <a:t>12/28/2025</a:t>
             </a:fld>
             <a:endParaRPr lang="en-US" dirty="0"/>
           </a:p>
@@ -921,7 +926,7 @@
           </a:lstStyle>
           <a:p>
             <a:r>
-              <a:rPr lang="en-US" smtClean="0"/>
+              <a:rPr lang="en-US"/>
               <a:t>Click to edit Master title style</a:t>
             </a:r>
             <a:endParaRPr lang="en-US" dirty="0"/>
@@ -989,7 +994,7 @@
           <a:p>
             <a:pPr lvl="0"/>
             <a:r>
-              <a:rPr lang="en-US" smtClean="0"/>
+              <a:rPr lang="en-US"/>
               <a:t>Edit Master text styles</a:t>
             </a:r>
           </a:p>
@@ -1056,7 +1061,7 @@
           <a:p>
             <a:pPr lvl="0"/>
             <a:r>
-              <a:rPr lang="en-US" smtClean="0"/>
+              <a:rPr lang="en-US"/>
               <a:t>Edit Master text styles</a:t>
             </a:r>
           </a:p>
@@ -1089,7 +1094,7 @@
             <a:fld id="{48A87A34-81AB-432B-8DAE-1953F412C126}" type="datetimeFigureOut">
               <a:rPr lang="en-US" dirty="0"/>
               <a:pPr/>
-              <a:t>5/25/2025</a:t>
+              <a:t>12/28/2025</a:t>
             </a:fld>
             <a:endParaRPr lang="en-US" dirty="0"/>
           </a:p>
@@ -1459,7 +1464,7 @@
           </a:lstStyle>
           <a:p>
             <a:r>
-              <a:rPr lang="en-US" smtClean="0"/>
+              <a:rPr lang="en-US"/>
               <a:t>Click to edit Master title style</a:t>
             </a:r>
             <a:endParaRPr lang="en-US" dirty="0"/>
@@ -1525,7 +1530,7 @@
           <a:p>
             <a:pPr lvl="0"/>
             <a:r>
-              <a:rPr lang="en-US" smtClean="0"/>
+              <a:rPr lang="en-US"/>
               <a:t>Edit Master text styles</a:t>
             </a:r>
           </a:p>
@@ -1558,7 +1563,7 @@
             <a:fld id="{48A87A34-81AB-432B-8DAE-1953F412C126}" type="datetimeFigureOut">
               <a:rPr lang="en-US" dirty="0"/>
               <a:pPr/>
-              <a:t>5/25/2025</a:t>
+              <a:t>12/28/2025</a:t>
             </a:fld>
             <a:endParaRPr lang="en-US" dirty="0"/>
           </a:p>
@@ -1662,7 +1667,7 @@
           <a:lstStyle/>
           <a:p>
             <a:r>
-              <a:rPr lang="en-US" smtClean="0"/>
+              <a:rPr lang="en-US"/>
               <a:t>Click to edit Master title style</a:t>
             </a:r>
             <a:endParaRPr lang="en-US" dirty="0"/>
@@ -1734,7 +1739,7 @@
           <a:p>
             <a:pPr lvl="0"/>
             <a:r>
-              <a:rPr lang="en-US" smtClean="0"/>
+              <a:rPr lang="en-US"/>
               <a:t>Edit Master text styles</a:t>
             </a:r>
           </a:p>
@@ -1801,7 +1806,7 @@
           <a:p>
             <a:pPr lvl="0"/>
             <a:r>
-              <a:rPr lang="en-US" smtClean="0"/>
+              <a:rPr lang="en-US"/>
               <a:t>Edit Master text styles</a:t>
             </a:r>
           </a:p>
@@ -1872,7 +1877,7 @@
           <a:p>
             <a:pPr lvl="0"/>
             <a:r>
-              <a:rPr lang="en-US" smtClean="0"/>
+              <a:rPr lang="en-US"/>
               <a:t>Edit Master text styles</a:t>
             </a:r>
           </a:p>
@@ -1939,7 +1944,7 @@
           <a:p>
             <a:pPr lvl="0"/>
             <a:r>
-              <a:rPr lang="en-US" smtClean="0"/>
+              <a:rPr lang="en-US"/>
               <a:t>Edit Master text styles</a:t>
             </a:r>
           </a:p>
@@ -2010,7 +2015,7 @@
           <a:p>
             <a:pPr lvl="0"/>
             <a:r>
-              <a:rPr lang="en-US" smtClean="0"/>
+              <a:rPr lang="en-US"/>
               <a:t>Edit Master text styles</a:t>
             </a:r>
           </a:p>
@@ -2077,7 +2082,7 @@
           <a:p>
             <a:pPr lvl="0"/>
             <a:r>
-              <a:rPr lang="en-US" smtClean="0"/>
+              <a:rPr lang="en-US"/>
               <a:t>Edit Master text styles</a:t>
             </a:r>
           </a:p>
@@ -2100,7 +2105,7 @@
           <a:p>
             <a:fld id="{48A87A34-81AB-432B-8DAE-1953F412C126}" type="datetimeFigureOut">
               <a:rPr lang="en-US" dirty="0"/>
-              <a:t>5/25/2025</a:t>
+              <a:t>12/28/2025</a:t>
             </a:fld>
             <a:endParaRPr lang="en-US" dirty="0"/>
           </a:p>
@@ -2194,7 +2199,7 @@
           <a:lstStyle/>
           <a:p>
             <a:r>
-              <a:rPr lang="en-US" smtClean="0"/>
+              <a:rPr lang="en-US"/>
               <a:t>Click to edit Master title style</a:t>
             </a:r>
             <a:endParaRPr lang="en-US" dirty="0"/>
@@ -2266,7 +2271,7 @@
           <a:p>
             <a:pPr lvl="0"/>
             <a:r>
-              <a:rPr lang="en-US" smtClean="0"/>
+              <a:rPr lang="en-US"/>
               <a:t>Edit Master text styles</a:t>
             </a:r>
           </a:p>
@@ -2344,7 +2349,7 @@
           </a:lstStyle>
           <a:p>
             <a:r>
-              <a:rPr lang="en-US" smtClean="0"/>
+              <a:rPr lang="en-US"/>
               <a:t>Click icon to add picture</a:t>
             </a:r>
             <a:endParaRPr lang="en-US" dirty="0"/>
@@ -2412,7 +2417,7 @@
           <a:p>
             <a:pPr lvl="0"/>
             <a:r>
-              <a:rPr lang="en-US" smtClean="0"/>
+              <a:rPr lang="en-US"/>
               <a:t>Edit Master text styles</a:t>
             </a:r>
           </a:p>
@@ -2483,7 +2488,7 @@
           <a:p>
             <a:pPr lvl="0"/>
             <a:r>
-              <a:rPr lang="en-US" smtClean="0"/>
+              <a:rPr lang="en-US"/>
               <a:t>Edit Master text styles</a:t>
             </a:r>
           </a:p>
@@ -2561,7 +2566,7 @@
           </a:lstStyle>
           <a:p>
             <a:r>
-              <a:rPr lang="en-US" smtClean="0"/>
+              <a:rPr lang="en-US"/>
               <a:t>Click icon to add picture</a:t>
             </a:r>
             <a:endParaRPr lang="en-US" dirty="0"/>
@@ -2629,7 +2634,7 @@
           <a:p>
             <a:pPr lvl="0"/>
             <a:r>
-              <a:rPr lang="en-US" smtClean="0"/>
+              <a:rPr lang="en-US"/>
               <a:t>Edit Master text styles</a:t>
             </a:r>
           </a:p>
@@ -2700,7 +2705,7 @@
           <a:p>
             <a:pPr lvl="0"/>
             <a:r>
-              <a:rPr lang="en-US" smtClean="0"/>
+              <a:rPr lang="en-US"/>
               <a:t>Edit Master text styles</a:t>
             </a:r>
           </a:p>
@@ -2778,7 +2783,7 @@
           </a:lstStyle>
           <a:p>
             <a:r>
-              <a:rPr lang="en-US" smtClean="0"/>
+              <a:rPr lang="en-US"/>
               <a:t>Click icon to add picture</a:t>
             </a:r>
             <a:endParaRPr lang="en-US" dirty="0"/>
@@ -2846,7 +2851,7 @@
           <a:p>
             <a:pPr lvl="0"/>
             <a:r>
-              <a:rPr lang="en-US" smtClean="0"/>
+              <a:rPr lang="en-US"/>
               <a:t>Edit Master text styles</a:t>
             </a:r>
           </a:p>
@@ -2869,7 +2874,7 @@
           <a:p>
             <a:fld id="{48A87A34-81AB-432B-8DAE-1953F412C126}" type="datetimeFigureOut">
               <a:rPr lang="en-US" dirty="0"/>
-              <a:t>5/25/2025</a:t>
+              <a:t>12/28/2025</a:t>
             </a:fld>
             <a:endParaRPr lang="en-US" dirty="0"/>
           </a:p>
@@ -2958,7 +2963,7 @@
           <a:lstStyle/>
           <a:p>
             <a:r>
-              <a:rPr lang="en-US" smtClean="0"/>
+              <a:rPr lang="en-US"/>
               <a:t>Click to edit Master title style</a:t>
             </a:r>
             <a:endParaRPr lang="en-US" dirty="0"/>
@@ -2987,35 +2992,35 @@
           <a:p>
             <a:pPr lvl="0"/>
             <a:r>
-              <a:rPr lang="en-US" smtClean="0"/>
+              <a:rPr lang="en-US"/>
               <a:t>Edit Master text styles</a:t>
             </a:r>
           </a:p>
           <a:p>
             <a:pPr lvl="1"/>
             <a:r>
-              <a:rPr lang="en-US" smtClean="0"/>
+              <a:rPr lang="en-US"/>
               <a:t>Second level</a:t>
             </a:r>
           </a:p>
           <a:p>
             <a:pPr lvl="2"/>
             <a:r>
-              <a:rPr lang="en-US" smtClean="0"/>
+              <a:rPr lang="en-US"/>
               <a:t>Third level</a:t>
             </a:r>
           </a:p>
           <a:p>
             <a:pPr lvl="3"/>
             <a:r>
-              <a:rPr lang="en-US" smtClean="0"/>
+              <a:rPr lang="en-US"/>
               <a:t>Fourth level</a:t>
             </a:r>
           </a:p>
           <a:p>
             <a:pPr lvl="4"/>
             <a:r>
-              <a:rPr lang="en-US" smtClean="0"/>
+              <a:rPr lang="en-US"/>
               <a:t>Fifth level</a:t>
             </a:r>
             <a:endParaRPr lang="en-US" dirty="0"/>
@@ -3039,7 +3044,7 @@
           <a:p>
             <a:fld id="{48A87A34-81AB-432B-8DAE-1953F412C126}" type="datetimeFigureOut">
               <a:rPr lang="en-US" dirty="0"/>
-              <a:t>5/25/2025</a:t>
+              <a:t>12/28/2025</a:t>
             </a:fld>
             <a:endParaRPr lang="en-US" dirty="0"/>
           </a:p>
@@ -3167,7 +3172,7 @@
           </a:lstStyle>
           <a:p>
             <a:r>
-              <a:rPr lang="en-US" smtClean="0"/>
+              <a:rPr lang="en-US"/>
               <a:t>Click to edit Master title style</a:t>
             </a:r>
             <a:endParaRPr lang="en-US" dirty="0"/>
@@ -3196,35 +3201,35 @@
           <a:p>
             <a:pPr lvl="0"/>
             <a:r>
-              <a:rPr lang="en-US" smtClean="0"/>
+              <a:rPr lang="en-US"/>
               <a:t>Edit Master text styles</a:t>
             </a:r>
           </a:p>
           <a:p>
             <a:pPr lvl="1"/>
             <a:r>
-              <a:rPr lang="en-US" smtClean="0"/>
+              <a:rPr lang="en-US"/>
               <a:t>Second level</a:t>
             </a:r>
           </a:p>
           <a:p>
             <a:pPr lvl="2"/>
             <a:r>
-              <a:rPr lang="en-US" smtClean="0"/>
+              <a:rPr lang="en-US"/>
               <a:t>Third level</a:t>
             </a:r>
           </a:p>
           <a:p>
             <a:pPr lvl="3"/>
             <a:r>
-              <a:rPr lang="en-US" smtClean="0"/>
+              <a:rPr lang="en-US"/>
               <a:t>Fourth level</a:t>
             </a:r>
           </a:p>
           <a:p>
             <a:pPr lvl="4"/>
             <a:r>
-              <a:rPr lang="en-US" smtClean="0"/>
+              <a:rPr lang="en-US"/>
               <a:t>Fifth level</a:t>
             </a:r>
             <a:endParaRPr lang="en-US" dirty="0"/>
@@ -3258,7 +3263,7 @@
             <a:fld id="{48A87A34-81AB-432B-8DAE-1953F412C126}" type="datetimeFigureOut">
               <a:rPr lang="en-US" dirty="0"/>
               <a:pPr/>
-              <a:t>5/25/2025</a:t>
+              <a:t>12/28/2025</a:t>
             </a:fld>
             <a:endParaRPr lang="en-US" dirty="0"/>
           </a:p>
@@ -3357,7 +3362,7 @@
           <a:lstStyle/>
           <a:p>
             <a:r>
-              <a:rPr lang="en-US" smtClean="0"/>
+              <a:rPr lang="en-US"/>
               <a:t>Click to edit Master title style</a:t>
             </a:r>
             <a:endParaRPr lang="en-US" dirty="0"/>
@@ -3381,35 +3386,35 @@
           <a:p>
             <a:pPr lvl="0"/>
             <a:r>
-              <a:rPr lang="en-US" smtClean="0"/>
+              <a:rPr lang="en-US"/>
               <a:t>Edit Master text styles</a:t>
             </a:r>
           </a:p>
           <a:p>
             <a:pPr lvl="1"/>
             <a:r>
-              <a:rPr lang="en-US" smtClean="0"/>
+              <a:rPr lang="en-US"/>
               <a:t>Second level</a:t>
             </a:r>
           </a:p>
           <a:p>
             <a:pPr lvl="2"/>
             <a:r>
-              <a:rPr lang="en-US" smtClean="0"/>
+              <a:rPr lang="en-US"/>
               <a:t>Third level</a:t>
             </a:r>
           </a:p>
           <a:p>
             <a:pPr lvl="3"/>
             <a:r>
-              <a:rPr lang="en-US" smtClean="0"/>
+              <a:rPr lang="en-US"/>
               <a:t>Fourth level</a:t>
             </a:r>
           </a:p>
           <a:p>
             <a:pPr lvl="4"/>
             <a:r>
-              <a:rPr lang="en-US" smtClean="0"/>
+              <a:rPr lang="en-US"/>
               <a:t>Fifth level</a:t>
             </a:r>
             <a:endParaRPr lang="en-US" dirty="0"/>
@@ -3433,7 +3438,7 @@
           <a:p>
             <a:fld id="{48A87A34-81AB-432B-8DAE-1953F412C126}" type="datetimeFigureOut">
               <a:rPr lang="en-US" dirty="0"/>
-              <a:t>5/25/2025</a:t>
+              <a:t>12/28/2025</a:t>
             </a:fld>
             <a:endParaRPr lang="en-US" dirty="0"/>
           </a:p>
@@ -3563,7 +3568,7 @@
           </a:lstStyle>
           <a:p>
             <a:r>
-              <a:rPr lang="en-US" smtClean="0"/>
+              <a:rPr lang="en-US"/>
               <a:t>Click to edit Master title style</a:t>
             </a:r>
             <a:endParaRPr lang="en-US" dirty="0"/>
@@ -3685,7 +3690,7 @@
           <a:p>
             <a:pPr lvl="0"/>
             <a:r>
-              <a:rPr lang="en-US" smtClean="0"/>
+              <a:rPr lang="en-US"/>
               <a:t>Edit Master text styles</a:t>
             </a:r>
           </a:p>
@@ -3718,7 +3723,7 @@
             <a:fld id="{48A87A34-81AB-432B-8DAE-1953F412C126}" type="datetimeFigureOut">
               <a:rPr lang="en-US" dirty="0"/>
               <a:pPr/>
-              <a:t>5/25/2025</a:t>
+              <a:t>12/28/2025</a:t>
             </a:fld>
             <a:endParaRPr lang="en-US" dirty="0"/>
           </a:p>
@@ -3817,7 +3822,7 @@
           <a:lstStyle/>
           <a:p>
             <a:r>
-              <a:rPr lang="en-US" smtClean="0"/>
+              <a:rPr lang="en-US"/>
               <a:t>Click to edit Master title style</a:t>
             </a:r>
             <a:endParaRPr lang="en-US" dirty="0"/>
@@ -3846,35 +3851,35 @@
           <a:p>
             <a:pPr lvl="0"/>
             <a:r>
-              <a:rPr lang="en-US" smtClean="0"/>
+              <a:rPr lang="en-US"/>
               <a:t>Edit Master text styles</a:t>
             </a:r>
           </a:p>
           <a:p>
             <a:pPr lvl="1"/>
             <a:r>
-              <a:rPr lang="en-US" smtClean="0"/>
+              <a:rPr lang="en-US"/>
               <a:t>Second level</a:t>
             </a:r>
           </a:p>
           <a:p>
             <a:pPr lvl="2"/>
             <a:r>
-              <a:rPr lang="en-US" smtClean="0"/>
+              <a:rPr lang="en-US"/>
               <a:t>Third level</a:t>
             </a:r>
           </a:p>
           <a:p>
             <a:pPr lvl="3"/>
             <a:r>
-              <a:rPr lang="en-US" smtClean="0"/>
+              <a:rPr lang="en-US"/>
               <a:t>Fourth level</a:t>
             </a:r>
           </a:p>
           <a:p>
             <a:pPr lvl="4"/>
             <a:r>
-              <a:rPr lang="en-US" smtClean="0"/>
+              <a:rPr lang="en-US"/>
               <a:t>Fifth level</a:t>
             </a:r>
             <a:endParaRPr lang="en-US" dirty="0"/>
@@ -3903,35 +3908,35 @@
           <a:p>
             <a:pPr lvl="0"/>
             <a:r>
-              <a:rPr lang="en-US" smtClean="0"/>
+              <a:rPr lang="en-US"/>
               <a:t>Edit Master text styles</a:t>
             </a:r>
           </a:p>
           <a:p>
             <a:pPr lvl="1"/>
             <a:r>
-              <a:rPr lang="en-US" smtClean="0"/>
+              <a:rPr lang="en-US"/>
               <a:t>Second level</a:t>
             </a:r>
           </a:p>
           <a:p>
             <a:pPr lvl="2"/>
             <a:r>
-              <a:rPr lang="en-US" smtClean="0"/>
+              <a:rPr lang="en-US"/>
               <a:t>Third level</a:t>
             </a:r>
           </a:p>
           <a:p>
             <a:pPr lvl="3"/>
             <a:r>
-              <a:rPr lang="en-US" smtClean="0"/>
+              <a:rPr lang="en-US"/>
               <a:t>Fourth level</a:t>
             </a:r>
           </a:p>
           <a:p>
             <a:pPr lvl="4"/>
             <a:r>
-              <a:rPr lang="en-US" smtClean="0"/>
+              <a:rPr lang="en-US"/>
               <a:t>Fifth level</a:t>
             </a:r>
             <a:endParaRPr lang="en-US" dirty="0"/>
@@ -3955,7 +3960,7 @@
           <a:p>
             <a:fld id="{48A87A34-81AB-432B-8DAE-1953F412C126}" type="datetimeFigureOut">
               <a:rPr lang="en-US" dirty="0"/>
-              <a:t>5/25/2025</a:t>
+              <a:t>12/28/2025</a:t>
             </a:fld>
             <a:endParaRPr lang="en-US" dirty="0"/>
           </a:p>
@@ -4049,7 +4054,7 @@
           <a:lstStyle/>
           <a:p>
             <a:r>
-              <a:rPr lang="en-US" smtClean="0"/>
+              <a:rPr lang="en-US"/>
               <a:t>Click to edit Master title style</a:t>
             </a:r>
             <a:endParaRPr lang="en-US" dirty="0"/>
@@ -4121,7 +4126,7 @@
           <a:p>
             <a:pPr lvl="0"/>
             <a:r>
-              <a:rPr lang="en-US" smtClean="0"/>
+              <a:rPr lang="en-US"/>
               <a:t>Edit Master text styles</a:t>
             </a:r>
           </a:p>
@@ -4149,35 +4154,35 @@
           <a:p>
             <a:pPr lvl="0"/>
             <a:r>
-              <a:rPr lang="en-US" smtClean="0"/>
+              <a:rPr lang="en-US"/>
               <a:t>Edit Master text styles</a:t>
             </a:r>
           </a:p>
           <a:p>
             <a:pPr lvl="1"/>
             <a:r>
-              <a:rPr lang="en-US" smtClean="0"/>
+              <a:rPr lang="en-US"/>
               <a:t>Second level</a:t>
             </a:r>
           </a:p>
           <a:p>
             <a:pPr lvl="2"/>
             <a:r>
-              <a:rPr lang="en-US" smtClean="0"/>
+              <a:rPr lang="en-US"/>
               <a:t>Third level</a:t>
             </a:r>
           </a:p>
           <a:p>
             <a:pPr lvl="3"/>
             <a:r>
-              <a:rPr lang="en-US" smtClean="0"/>
+              <a:rPr lang="en-US"/>
               <a:t>Fourth level</a:t>
             </a:r>
           </a:p>
           <a:p>
             <a:pPr lvl="4"/>
             <a:r>
-              <a:rPr lang="en-US" smtClean="0"/>
+              <a:rPr lang="en-US"/>
               <a:t>Fifth level</a:t>
             </a:r>
             <a:endParaRPr lang="en-US" dirty="0"/>
@@ -4249,7 +4254,7 @@
           <a:p>
             <a:pPr lvl="0"/>
             <a:r>
-              <a:rPr lang="en-US" smtClean="0"/>
+              <a:rPr lang="en-US"/>
               <a:t>Edit Master text styles</a:t>
             </a:r>
           </a:p>
@@ -4277,35 +4282,35 @@
           <a:p>
             <a:pPr lvl="0"/>
             <a:r>
-              <a:rPr lang="en-US" smtClean="0"/>
+              <a:rPr lang="en-US"/>
               <a:t>Edit Master text styles</a:t>
             </a:r>
           </a:p>
           <a:p>
             <a:pPr lvl="1"/>
             <a:r>
-              <a:rPr lang="en-US" smtClean="0"/>
+              <a:rPr lang="en-US"/>
               <a:t>Second level</a:t>
             </a:r>
           </a:p>
           <a:p>
             <a:pPr lvl="2"/>
             <a:r>
-              <a:rPr lang="en-US" smtClean="0"/>
+              <a:rPr lang="en-US"/>
               <a:t>Third level</a:t>
             </a:r>
           </a:p>
           <a:p>
             <a:pPr lvl="3"/>
             <a:r>
-              <a:rPr lang="en-US" smtClean="0"/>
+              <a:rPr lang="en-US"/>
               <a:t>Fourth level</a:t>
             </a:r>
           </a:p>
           <a:p>
             <a:pPr lvl="4"/>
             <a:r>
-              <a:rPr lang="en-US" smtClean="0"/>
+              <a:rPr lang="en-US"/>
               <a:t>Fifth level</a:t>
             </a:r>
             <a:endParaRPr lang="en-US" dirty="0"/>
@@ -4329,7 +4334,7 @@
           <a:p>
             <a:fld id="{48A87A34-81AB-432B-8DAE-1953F412C126}" type="datetimeFigureOut">
               <a:rPr lang="en-US" dirty="0"/>
-              <a:t>5/25/2025</a:t>
+              <a:t>12/28/2025</a:t>
             </a:fld>
             <a:endParaRPr lang="en-US" dirty="0"/>
           </a:p>
@@ -4418,7 +4423,7 @@
           <a:lstStyle/>
           <a:p>
             <a:r>
-              <a:rPr lang="en-US" smtClean="0"/>
+              <a:rPr lang="en-US"/>
               <a:t>Click to edit Master title style</a:t>
             </a:r>
             <a:endParaRPr lang="en-US" dirty="0"/>
@@ -4442,7 +4447,7 @@
           <a:p>
             <a:fld id="{48A87A34-81AB-432B-8DAE-1953F412C126}" type="datetimeFigureOut">
               <a:rPr lang="en-US" dirty="0"/>
-              <a:t>5/25/2025</a:t>
+              <a:t>12/28/2025</a:t>
             </a:fld>
             <a:endParaRPr lang="en-US" dirty="0"/>
           </a:p>
@@ -4532,7 +4537,7 @@
           <a:p>
             <a:fld id="{48A87A34-81AB-432B-8DAE-1953F412C126}" type="datetimeFigureOut">
               <a:rPr lang="en-US" dirty="0"/>
-              <a:t>5/25/2025</a:t>
+              <a:t>12/28/2025</a:t>
             </a:fld>
             <a:endParaRPr lang="en-US" dirty="0"/>
           </a:p>
@@ -4630,7 +4635,7 @@
           </a:lstStyle>
           <a:p>
             <a:r>
-              <a:rPr lang="en-US" smtClean="0"/>
+              <a:rPr lang="en-US"/>
               <a:t>Click to edit Master title style</a:t>
             </a:r>
             <a:endParaRPr lang="en-US" dirty="0"/>
@@ -4659,35 +4664,35 @@
           <a:p>
             <a:pPr lvl="0"/>
             <a:r>
-              <a:rPr lang="en-US" smtClean="0"/>
+              <a:rPr lang="en-US"/>
               <a:t>Edit Master text styles</a:t>
             </a:r>
           </a:p>
           <a:p>
             <a:pPr lvl="1"/>
             <a:r>
-              <a:rPr lang="en-US" smtClean="0"/>
+              <a:rPr lang="en-US"/>
               <a:t>Second level</a:t>
             </a:r>
           </a:p>
           <a:p>
             <a:pPr lvl="2"/>
             <a:r>
-              <a:rPr lang="en-US" smtClean="0"/>
+              <a:rPr lang="en-US"/>
               <a:t>Third level</a:t>
             </a:r>
           </a:p>
           <a:p>
             <a:pPr lvl="3"/>
             <a:r>
-              <a:rPr lang="en-US" smtClean="0"/>
+              <a:rPr lang="en-US"/>
               <a:t>Fourth level</a:t>
             </a:r>
           </a:p>
           <a:p>
             <a:pPr lvl="4"/>
             <a:r>
-              <a:rPr lang="en-US" smtClean="0"/>
+              <a:rPr lang="en-US"/>
               <a:t>Fifth level</a:t>
             </a:r>
             <a:endParaRPr lang="en-US" dirty="0"/>
@@ -4753,7 +4758,7 @@
           <a:p>
             <a:pPr lvl="0"/>
             <a:r>
-              <a:rPr lang="en-US" smtClean="0"/>
+              <a:rPr lang="en-US"/>
               <a:t>Edit Master text styles</a:t>
             </a:r>
           </a:p>
@@ -4776,7 +4781,7 @@
           <a:p>
             <a:fld id="{48A87A34-81AB-432B-8DAE-1953F412C126}" type="datetimeFigureOut">
               <a:rPr lang="en-US" dirty="0"/>
-              <a:t>5/25/2025</a:t>
+              <a:t>12/28/2025</a:t>
             </a:fld>
             <a:endParaRPr lang="en-US" dirty="0"/>
           </a:p>
@@ -4874,7 +4879,7 @@
           </a:lstStyle>
           <a:p>
             <a:r>
-              <a:rPr lang="en-US" smtClean="0"/>
+              <a:rPr lang="en-US"/>
               <a:t>Click to edit Master title style</a:t>
             </a:r>
             <a:endParaRPr lang="en-US" dirty="0"/>
@@ -4939,7 +4944,7 @@
           </a:lstStyle>
           <a:p>
             <a:r>
-              <a:rPr lang="en-US" smtClean="0"/>
+              <a:rPr lang="en-US"/>
               <a:t>Click icon to add picture</a:t>
             </a:r>
             <a:endParaRPr lang="en-US" dirty="0"/>
@@ -5005,7 +5010,7 @@
           <a:p>
             <a:pPr lvl="0"/>
             <a:r>
-              <a:rPr lang="en-US" smtClean="0"/>
+              <a:rPr lang="en-US"/>
               <a:t>Edit Master text styles</a:t>
             </a:r>
           </a:p>
@@ -5028,7 +5033,7 @@
           <a:p>
             <a:fld id="{48A87A34-81AB-432B-8DAE-1953F412C126}" type="datetimeFigureOut">
               <a:rPr lang="en-US" dirty="0"/>
-              <a:t>5/25/2025</a:t>
+              <a:t>12/28/2025</a:t>
             </a:fld>
             <a:endParaRPr lang="en-US" dirty="0"/>
           </a:p>
@@ -5162,7 +5167,7 @@
           <a:lstStyle/>
           <a:p>
             <a:r>
-              <a:rPr lang="en-US" smtClean="0"/>
+              <a:rPr lang="en-US"/>
               <a:t>Click to edit Master title style</a:t>
             </a:r>
             <a:endParaRPr lang="en-US" dirty="0"/>
@@ -5196,35 +5201,35 @@
           <a:p>
             <a:pPr lvl="0"/>
             <a:r>
-              <a:rPr lang="en-US" smtClean="0"/>
+              <a:rPr lang="en-US"/>
               <a:t>Edit Master text styles</a:t>
             </a:r>
           </a:p>
           <a:p>
             <a:pPr lvl="1"/>
             <a:r>
-              <a:rPr lang="en-US" smtClean="0"/>
+              <a:rPr lang="en-US"/>
               <a:t>Second level</a:t>
             </a:r>
           </a:p>
           <a:p>
             <a:pPr lvl="2"/>
             <a:r>
-              <a:rPr lang="en-US" smtClean="0"/>
+              <a:rPr lang="en-US"/>
               <a:t>Third level</a:t>
             </a:r>
           </a:p>
           <a:p>
             <a:pPr lvl="3"/>
             <a:r>
-              <a:rPr lang="en-US" smtClean="0"/>
+              <a:rPr lang="en-US"/>
               <a:t>Fourth level</a:t>
             </a:r>
           </a:p>
           <a:p>
             <a:pPr lvl="4"/>
             <a:r>
-              <a:rPr lang="en-US" smtClean="0"/>
+              <a:rPr lang="en-US"/>
               <a:t>Fifth level</a:t>
             </a:r>
             <a:endParaRPr lang="en-US" dirty="0"/>
@@ -5267,7 +5272,7 @@
             <a:fld id="{48A87A34-81AB-432B-8DAE-1953F412C126}" type="datetimeFigureOut">
               <a:rPr lang="en-US" dirty="0"/>
               <a:pPr/>
-              <a:t>5/25/2025</a:t>
+              <a:t>12/28/2025</a:t>
             </a:fld>
             <a:endParaRPr lang="en-US" dirty="0"/>
           </a:p>
@@ -5695,7 +5700,6 @@
               <a:rPr lang="en-US" sz="4000" dirty="0"/>
               <a:t>Introduction to Programming Language II(Java)</a:t>
             </a:r>
-            <a:endParaRPr lang="en-US" sz="4000" dirty="0"/>
           </a:p>
         </p:txBody>
       </p:sp>
@@ -5715,11 +5719,11 @@
           <a:lstStyle/>
           <a:p>
             <a:r>
-              <a:rPr lang="en-US" dirty="0" smtClean="0"/>
+              <a:rPr lang="en-US" dirty="0"/>
               <a:t>Fariha </a:t>
             </a:r>
             <a:r>
-              <a:rPr lang="en-US" dirty="0" err="1" smtClean="0"/>
+              <a:rPr lang="en-US" dirty="0" err="1"/>
               <a:t>Zahin</a:t>
             </a:r>
             <a:endParaRPr lang="en-US" dirty="0"/>
@@ -5764,829 +5768,7 @@
         </p:nvSpPr>
         <p:spPr>
           <a:xfrm>
-            <a:off x="554181" y="1351063"/>
-            <a:ext cx="10529455" cy="923330"/>
-          </a:xfrm>
-          <a:prstGeom prst="rect">
-            <a:avLst/>
-          </a:prstGeom>
-        </p:spPr>
-        <p:txBody>
-          <a:bodyPr wrap="square">
-            <a:spAutoFit/>
-          </a:bodyPr>
-          <a:lstStyle/>
-          <a:p>
-            <a:r>
-              <a:rPr lang="en-US" b="1" dirty="0"/>
-              <a:t>throw keyword</a:t>
-            </a:r>
-          </a:p>
-          <a:p>
-            <a:r>
-              <a:rPr lang="en-US" b="1" dirty="0"/>
-              <a:t>Used for:</a:t>
-            </a:r>
-            <a:r>
-              <a:rPr lang="en-US" dirty="0"/>
-              <a:t> Manually throwing an exception (built-in or custom).</a:t>
-            </a:r>
-            <a:br>
-              <a:rPr lang="en-US" dirty="0"/>
-            </a:br>
-            <a:r>
-              <a:rPr lang="en-US" b="1" dirty="0"/>
-              <a:t>Rules:</a:t>
-            </a:r>
-            <a:r>
-              <a:rPr lang="en-US" dirty="0"/>
-              <a:t> Only one exception can be thrown at a time using throw.</a:t>
-            </a:r>
-          </a:p>
-        </p:txBody>
-      </p:sp>
-      <p:pic>
-        <p:nvPicPr>
-          <p:cNvPr id="3" name="Picture 2"/>
-          <p:cNvPicPr>
-            <a:picLocks noChangeAspect="1"/>
-          </p:cNvPicPr>
-          <p:nvPr/>
-        </p:nvPicPr>
-        <p:blipFill>
-          <a:blip r:embed="rId2"/>
-          <a:stretch>
-            <a:fillRect/>
-          </a:stretch>
-        </p:blipFill>
-        <p:spPr>
-          <a:xfrm>
-            <a:off x="2213694" y="2739389"/>
-            <a:ext cx="6926084" cy="2719302"/>
-          </a:xfrm>
-          <a:prstGeom prst="rect">
-            <a:avLst/>
-          </a:prstGeom>
-        </p:spPr>
-      </p:pic>
-    </p:spTree>
-    <p:extLst>
-      <p:ext uri="{BB962C8B-B14F-4D97-AF65-F5344CB8AC3E}">
-        <p14:creationId xmlns:p14="http://schemas.microsoft.com/office/powerpoint/2010/main" val="2765831023"/>
-      </p:ext>
-    </p:extLst>
-  </p:cSld>
-  <p:clrMapOvr>
-    <a:masterClrMapping/>
-  </p:clrMapOvr>
-</p:sld>
-</file>
-
-<file path=ppt/slides/slide11.xml><?xml version="1.0" encoding="utf-8"?>
-<p:sld xmlns:a="http://schemas.openxmlformats.org/drawingml/2006/main" xmlns:r="http://schemas.openxmlformats.org/officeDocument/2006/relationships" xmlns:p="http://schemas.openxmlformats.org/presentationml/2006/main">
-  <p:cSld>
-    <p:spTree>
-      <p:nvGrpSpPr>
-        <p:cNvPr id="1" name=""/>
-        <p:cNvGrpSpPr/>
-        <p:nvPr/>
-      </p:nvGrpSpPr>
-      <p:grpSpPr>
-        <a:xfrm>
-          <a:off x="0" y="0"/>
-          <a:ext cx="0" cy="0"/>
-          <a:chOff x="0" y="0"/>
-          <a:chExt cx="0" cy="0"/>
-        </a:xfrm>
-      </p:grpSpPr>
-      <p:sp>
-        <p:nvSpPr>
-          <p:cNvPr id="2" name="Rectangle 1"/>
-          <p:cNvSpPr/>
-          <p:nvPr/>
-        </p:nvSpPr>
-        <p:spPr>
-          <a:xfrm>
-            <a:off x="581891" y="1360300"/>
-            <a:ext cx="10815782" cy="923330"/>
-          </a:xfrm>
-          <a:prstGeom prst="rect">
-            <a:avLst/>
-          </a:prstGeom>
-        </p:spPr>
-        <p:txBody>
-          <a:bodyPr wrap="square">
-            <a:spAutoFit/>
-          </a:bodyPr>
-          <a:lstStyle/>
-          <a:p>
-            <a:r>
-              <a:rPr lang="en-US" b="1" dirty="0"/>
-              <a:t>throws keyword</a:t>
-            </a:r>
-          </a:p>
-          <a:p>
-            <a:r>
-              <a:rPr lang="en-US" b="1" dirty="0"/>
-              <a:t>Used for:</a:t>
-            </a:r>
-            <a:r>
-              <a:rPr lang="en-US" dirty="0"/>
-              <a:t> Declaring exceptions a method might throw.</a:t>
-            </a:r>
-            <a:br>
-              <a:rPr lang="en-US" dirty="0"/>
-            </a:br>
-            <a:r>
-              <a:rPr lang="en-US" b="1" dirty="0"/>
-              <a:t>Rules:</a:t>
-            </a:r>
-            <a:r>
-              <a:rPr lang="en-US" dirty="0"/>
-              <a:t> Helps inform the caller to handle the exception.</a:t>
-            </a:r>
-          </a:p>
-        </p:txBody>
-      </p:sp>
-      <p:pic>
-        <p:nvPicPr>
-          <p:cNvPr id="3" name="Picture 2"/>
-          <p:cNvPicPr>
-            <a:picLocks noChangeAspect="1"/>
-          </p:cNvPicPr>
-          <p:nvPr/>
-        </p:nvPicPr>
-        <p:blipFill>
-          <a:blip r:embed="rId2"/>
-          <a:stretch>
-            <a:fillRect/>
-          </a:stretch>
-        </p:blipFill>
-        <p:spPr>
-          <a:xfrm>
-            <a:off x="2689953" y="2493158"/>
-            <a:ext cx="5842817" cy="3547424"/>
-          </a:xfrm>
-          <a:prstGeom prst="rect">
-            <a:avLst/>
-          </a:prstGeom>
-        </p:spPr>
-      </p:pic>
-    </p:spTree>
-    <p:extLst>
-      <p:ext uri="{BB962C8B-B14F-4D97-AF65-F5344CB8AC3E}">
-        <p14:creationId xmlns:p14="http://schemas.microsoft.com/office/powerpoint/2010/main" val="3081668947"/>
-      </p:ext>
-    </p:extLst>
-  </p:cSld>
-  <p:clrMapOvr>
-    <a:masterClrMapping/>
-  </p:clrMapOvr>
-</p:sld>
-</file>
-
-<file path=ppt/slides/slide12.xml><?xml version="1.0" encoding="utf-8"?>
-<p:sld xmlns:a="http://schemas.openxmlformats.org/drawingml/2006/main" xmlns:r="http://schemas.openxmlformats.org/officeDocument/2006/relationships" xmlns:p="http://schemas.openxmlformats.org/presentationml/2006/main">
-  <p:cSld>
-    <p:spTree>
-      <p:nvGrpSpPr>
-        <p:cNvPr id="1" name=""/>
-        <p:cNvGrpSpPr/>
-        <p:nvPr/>
-      </p:nvGrpSpPr>
-      <p:grpSpPr>
-        <a:xfrm>
-          <a:off x="0" y="0"/>
-          <a:ext cx="0" cy="0"/>
-          <a:chOff x="0" y="0"/>
-          <a:chExt cx="0" cy="0"/>
-        </a:xfrm>
-      </p:grpSpPr>
-      <p:sp>
-        <p:nvSpPr>
-          <p:cNvPr id="2" name="Rectangle 1"/>
-          <p:cNvSpPr/>
-          <p:nvPr/>
-        </p:nvSpPr>
-        <p:spPr>
-          <a:xfrm>
-            <a:off x="498765" y="1443841"/>
-            <a:ext cx="11222180" cy="2308324"/>
-          </a:xfrm>
-          <a:prstGeom prst="rect">
-            <a:avLst/>
-          </a:prstGeom>
-        </p:spPr>
-        <p:txBody>
-          <a:bodyPr wrap="square">
-            <a:spAutoFit/>
-          </a:bodyPr>
-          <a:lstStyle/>
-          <a:p>
-            <a:r>
-              <a:rPr lang="en-US" b="1" dirty="0"/>
-              <a:t>Custom User-Defined Exception in </a:t>
-            </a:r>
-            <a:r>
-              <a:rPr lang="en-US" b="1" dirty="0" smtClean="0"/>
-              <a:t>Java</a:t>
-            </a:r>
-            <a:r>
-              <a:rPr lang="en-US" dirty="0"/>
-              <a:t/>
-            </a:r>
-            <a:br>
-              <a:rPr lang="en-US" dirty="0"/>
-            </a:br>
-            <a:r>
-              <a:rPr lang="en-US" dirty="0"/>
-              <a:t>Java allows you to create your own exception classes by extending the built-in Exception class (or any of its subclasses). This helps you represent application-specific errors clearly.</a:t>
-            </a:r>
-          </a:p>
-          <a:p>
-            <a:pPr>
-              <a:buFont typeface="Arial" panose="020B0604020202020204" pitchFamily="34" charset="0"/>
-              <a:buChar char="•"/>
-            </a:pPr>
-            <a:r>
-              <a:rPr lang="en-US" dirty="0"/>
-              <a:t>Custom exceptions usually extend Exception (checked exceptions) or </a:t>
-            </a:r>
-            <a:r>
-              <a:rPr lang="en-US" dirty="0" err="1"/>
-              <a:t>RuntimeException</a:t>
-            </a:r>
-            <a:r>
-              <a:rPr lang="en-US" dirty="0"/>
-              <a:t> (unchecked exceptions).</a:t>
-            </a:r>
-          </a:p>
-          <a:p>
-            <a:pPr>
-              <a:buFont typeface="Arial" panose="020B0604020202020204" pitchFamily="34" charset="0"/>
-              <a:buChar char="•"/>
-            </a:pPr>
-            <a:r>
-              <a:rPr lang="en-US" dirty="0"/>
-              <a:t>You can add constructors and custom messages.</a:t>
-            </a:r>
-          </a:p>
-          <a:p>
-            <a:pPr>
-              <a:buFont typeface="Arial" panose="020B0604020202020204" pitchFamily="34" charset="0"/>
-              <a:buChar char="•"/>
-            </a:pPr>
-            <a:r>
-              <a:rPr lang="en-US" dirty="0"/>
-              <a:t>When your code detects a specific error condition, you throw your custom exception.</a:t>
-            </a:r>
-          </a:p>
-          <a:p>
-            <a:pPr>
-              <a:buFont typeface="Arial" panose="020B0604020202020204" pitchFamily="34" charset="0"/>
-              <a:buChar char="•"/>
-            </a:pPr>
-            <a:r>
-              <a:rPr lang="en-US" dirty="0"/>
-              <a:t>The caller handles it like any other exception using try-catch.</a:t>
-            </a:r>
-          </a:p>
-        </p:txBody>
-      </p:sp>
-      <p:pic>
-        <p:nvPicPr>
-          <p:cNvPr id="4" name="Picture 3"/>
-          <p:cNvPicPr>
-            <a:picLocks noChangeAspect="1"/>
-          </p:cNvPicPr>
-          <p:nvPr/>
-        </p:nvPicPr>
-        <p:blipFill>
-          <a:blip r:embed="rId2"/>
-          <a:stretch>
-            <a:fillRect/>
-          </a:stretch>
-        </p:blipFill>
-        <p:spPr>
-          <a:xfrm>
-            <a:off x="363019" y="4012582"/>
-            <a:ext cx="4978217" cy="2305089"/>
-          </a:xfrm>
-          <a:prstGeom prst="rect">
-            <a:avLst/>
-          </a:prstGeom>
-        </p:spPr>
-      </p:pic>
-      <p:pic>
-        <p:nvPicPr>
-          <p:cNvPr id="5" name="Picture 4"/>
-          <p:cNvPicPr>
-            <a:picLocks noChangeAspect="1"/>
-          </p:cNvPicPr>
-          <p:nvPr/>
-        </p:nvPicPr>
-        <p:blipFill>
-          <a:blip r:embed="rId3"/>
-          <a:stretch>
-            <a:fillRect/>
-          </a:stretch>
-        </p:blipFill>
-        <p:spPr>
-          <a:xfrm>
-            <a:off x="5697544" y="3971017"/>
-            <a:ext cx="5007402" cy="2388218"/>
-          </a:xfrm>
-          <a:prstGeom prst="rect">
-            <a:avLst/>
-          </a:prstGeom>
-        </p:spPr>
-      </p:pic>
-    </p:spTree>
-    <p:extLst>
-      <p:ext uri="{BB962C8B-B14F-4D97-AF65-F5344CB8AC3E}">
-        <p14:creationId xmlns:p14="http://schemas.microsoft.com/office/powerpoint/2010/main" val="2530876225"/>
-      </p:ext>
-    </p:extLst>
-  </p:cSld>
-  <p:clrMapOvr>
-    <a:masterClrMapping/>
-  </p:clrMapOvr>
-</p:sld>
-</file>
-
-<file path=ppt/slides/slide13.xml><?xml version="1.0" encoding="utf-8"?>
-<p:sld xmlns:a="http://schemas.openxmlformats.org/drawingml/2006/main" xmlns:r="http://schemas.openxmlformats.org/officeDocument/2006/relationships" xmlns:p="http://schemas.openxmlformats.org/presentationml/2006/main">
-  <p:cSld>
-    <p:spTree>
-      <p:nvGrpSpPr>
-        <p:cNvPr id="1" name=""/>
-        <p:cNvGrpSpPr/>
-        <p:nvPr/>
-      </p:nvGrpSpPr>
-      <p:grpSpPr>
-        <a:xfrm>
-          <a:off x="0" y="0"/>
-          <a:ext cx="0" cy="0"/>
-          <a:chOff x="0" y="0"/>
-          <a:chExt cx="0" cy="0"/>
-        </a:xfrm>
-      </p:grpSpPr>
-      <p:pic>
-        <p:nvPicPr>
-          <p:cNvPr id="2" name="Picture 1"/>
-          <p:cNvPicPr>
-            <a:picLocks noChangeAspect="1"/>
-          </p:cNvPicPr>
-          <p:nvPr/>
-        </p:nvPicPr>
-        <p:blipFill>
-          <a:blip r:embed="rId2"/>
-          <a:stretch>
-            <a:fillRect/>
-          </a:stretch>
-        </p:blipFill>
-        <p:spPr>
-          <a:xfrm>
-            <a:off x="561543" y="1533474"/>
-            <a:ext cx="5600988" cy="2761435"/>
-          </a:xfrm>
-          <a:prstGeom prst="rect">
-            <a:avLst/>
-          </a:prstGeom>
-        </p:spPr>
-      </p:pic>
-      <p:sp>
-        <p:nvSpPr>
-          <p:cNvPr id="3" name="Rectangle 2"/>
-          <p:cNvSpPr/>
-          <p:nvPr/>
-        </p:nvSpPr>
-        <p:spPr>
-          <a:xfrm>
-            <a:off x="2004290" y="4294909"/>
-            <a:ext cx="7693891" cy="2308324"/>
-          </a:xfrm>
-          <a:prstGeom prst="rect">
-            <a:avLst/>
-          </a:prstGeom>
-        </p:spPr>
-        <p:txBody>
-          <a:bodyPr wrap="square">
-            <a:spAutoFit/>
-          </a:bodyPr>
-          <a:lstStyle/>
-          <a:p>
-            <a:r>
-              <a:rPr lang="en-US" dirty="0"/>
-              <a:t>This code defines a custom exception class named </a:t>
-            </a:r>
-            <a:r>
-              <a:rPr lang="en-US" dirty="0" err="1"/>
-              <a:t>MyException</a:t>
-            </a:r>
-            <a:r>
-              <a:rPr lang="en-US" dirty="0"/>
-              <a:t> without any constructor. The method check throws this exception when the input number is less than zero. In the main method, check is called inside a try block. If the exception occurs, it is caught in the catch block, and a simple message is printed. Since the custom exception has no constructor with a message, no detailed error message is available. This shows that defining a constructor is optional but useful for passing error details.</a:t>
-            </a:r>
-          </a:p>
-        </p:txBody>
-      </p:sp>
-    </p:spTree>
-    <p:extLst>
-      <p:ext uri="{BB962C8B-B14F-4D97-AF65-F5344CB8AC3E}">
-        <p14:creationId xmlns:p14="http://schemas.microsoft.com/office/powerpoint/2010/main" val="3127140088"/>
-      </p:ext>
-    </p:extLst>
-  </p:cSld>
-  <p:clrMapOvr>
-    <a:masterClrMapping/>
-  </p:clrMapOvr>
-</p:sld>
-</file>
-
-<file path=ppt/slides/slide2.xml><?xml version="1.0" encoding="utf-8"?>
-<p:sld xmlns:a="http://schemas.openxmlformats.org/drawingml/2006/main" xmlns:r="http://schemas.openxmlformats.org/officeDocument/2006/relationships" xmlns:p="http://schemas.openxmlformats.org/presentationml/2006/main">
-  <p:cSld>
-    <p:spTree>
-      <p:nvGrpSpPr>
-        <p:cNvPr id="1" name=""/>
-        <p:cNvGrpSpPr/>
-        <p:nvPr/>
-      </p:nvGrpSpPr>
-      <p:grpSpPr>
-        <a:xfrm>
-          <a:off x="0" y="0"/>
-          <a:ext cx="0" cy="0"/>
-          <a:chOff x="0" y="0"/>
-          <a:chExt cx="0" cy="0"/>
-        </a:xfrm>
-      </p:grpSpPr>
-      <p:sp>
-        <p:nvSpPr>
-          <p:cNvPr id="2" name="Rectangle 1"/>
-          <p:cNvSpPr/>
-          <p:nvPr/>
-        </p:nvSpPr>
-        <p:spPr>
-          <a:xfrm>
-            <a:off x="725053" y="1332683"/>
-            <a:ext cx="10741891" cy="1477328"/>
-          </a:xfrm>
-          <a:prstGeom prst="rect">
-            <a:avLst/>
-          </a:prstGeom>
-        </p:spPr>
-        <p:txBody>
-          <a:bodyPr wrap="square">
-            <a:spAutoFit/>
-          </a:bodyPr>
-          <a:lstStyle/>
-          <a:p>
-            <a:r>
-              <a:rPr lang="en-US" b="1" dirty="0"/>
-              <a:t>What is Exception Handling?</a:t>
-            </a:r>
-          </a:p>
-          <a:p>
-            <a:pPr>
-              <a:buFont typeface="Arial" panose="020B0604020202020204" pitchFamily="34" charset="0"/>
-              <a:buChar char="•"/>
-            </a:pPr>
-            <a:r>
-              <a:rPr lang="en-US" dirty="0"/>
-              <a:t>Exception: An event that disrupts the normal flow of the program.</a:t>
-            </a:r>
-          </a:p>
-          <a:p>
-            <a:pPr>
-              <a:buFont typeface="Arial" panose="020B0604020202020204" pitchFamily="34" charset="0"/>
-              <a:buChar char="•"/>
-            </a:pPr>
-            <a:r>
-              <a:rPr lang="en-US" dirty="0"/>
-              <a:t>Handling: Mechanism to detect and handle runtime problems.</a:t>
-            </a:r>
-          </a:p>
-          <a:p>
-            <a:endParaRPr lang="en-US" b="1" dirty="0" smtClean="0"/>
-          </a:p>
-          <a:p>
-            <a:r>
-              <a:rPr lang="en-US" b="1" dirty="0" smtClean="0"/>
-              <a:t>**Java </a:t>
-            </a:r>
-            <a:r>
-              <a:rPr lang="en-US" b="1" dirty="0"/>
-              <a:t>provides a robust exception handling model using try, catch, throw, throws, and finally.</a:t>
-            </a:r>
-          </a:p>
-        </p:txBody>
-      </p:sp>
-      <p:sp>
-        <p:nvSpPr>
-          <p:cNvPr id="4" name="Rectangle 3"/>
-          <p:cNvSpPr/>
-          <p:nvPr/>
-        </p:nvSpPr>
-        <p:spPr>
-          <a:xfrm>
-            <a:off x="725053" y="3706475"/>
-            <a:ext cx="6096000" cy="2308324"/>
-          </a:xfrm>
-          <a:prstGeom prst="rect">
-            <a:avLst/>
-          </a:prstGeom>
-        </p:spPr>
-        <p:txBody>
-          <a:bodyPr>
-            <a:spAutoFit/>
-          </a:bodyPr>
-          <a:lstStyle/>
-          <a:p>
-            <a:r>
-              <a:rPr lang="en-US" b="1" dirty="0"/>
-              <a:t>Types of Exceptions</a:t>
-            </a:r>
-          </a:p>
-          <a:p>
-            <a:pPr>
-              <a:buFont typeface="+mj-lt"/>
-              <a:buAutoNum type="arabicPeriod"/>
-            </a:pPr>
-            <a:r>
-              <a:rPr lang="en-US" dirty="0"/>
-              <a:t>Checked Exception</a:t>
-            </a:r>
-          </a:p>
-          <a:p>
-            <a:pPr marL="742950" lvl="1" indent="-285750">
-              <a:buFont typeface="+mj-lt"/>
-              <a:buAutoNum type="arabicPeriod"/>
-            </a:pPr>
-            <a:r>
-              <a:rPr lang="en-US" dirty="0"/>
-              <a:t>Checked at compile time.</a:t>
-            </a:r>
-          </a:p>
-          <a:p>
-            <a:pPr marL="742950" lvl="1" indent="-285750">
-              <a:buFont typeface="+mj-lt"/>
-              <a:buAutoNum type="arabicPeriod"/>
-            </a:pPr>
-            <a:r>
-              <a:rPr lang="en-US" dirty="0"/>
-              <a:t>Examples: </a:t>
-            </a:r>
-            <a:r>
-              <a:rPr lang="en-US" dirty="0" err="1"/>
-              <a:t>IOException</a:t>
-            </a:r>
-            <a:r>
-              <a:rPr lang="en-US" dirty="0"/>
-              <a:t>, </a:t>
-            </a:r>
-            <a:r>
-              <a:rPr lang="en-US" dirty="0" err="1"/>
-              <a:t>SQLException</a:t>
-            </a:r>
-            <a:endParaRPr lang="en-US" dirty="0"/>
-          </a:p>
-          <a:p>
-            <a:pPr>
-              <a:buFont typeface="+mj-lt"/>
-              <a:buAutoNum type="arabicPeriod"/>
-            </a:pPr>
-            <a:r>
-              <a:rPr lang="en-US" dirty="0"/>
-              <a:t>Unchecked Exception</a:t>
-            </a:r>
-          </a:p>
-          <a:p>
-            <a:pPr marL="742950" lvl="1" indent="-285750">
-              <a:buFont typeface="+mj-lt"/>
-              <a:buAutoNum type="arabicPeriod"/>
-            </a:pPr>
-            <a:r>
-              <a:rPr lang="en-US" dirty="0"/>
-              <a:t>Occur at runtime.</a:t>
-            </a:r>
-          </a:p>
-          <a:p>
-            <a:pPr marL="742950" lvl="1" indent="-285750">
-              <a:buFont typeface="+mj-lt"/>
-              <a:buAutoNum type="arabicPeriod"/>
-            </a:pPr>
-            <a:r>
-              <a:rPr lang="en-US" dirty="0"/>
-              <a:t>Examples: </a:t>
-            </a:r>
-            <a:r>
-              <a:rPr lang="en-US" dirty="0" err="1"/>
-              <a:t>NullPointerException</a:t>
-            </a:r>
-            <a:r>
-              <a:rPr lang="en-US" dirty="0"/>
-              <a:t>, </a:t>
-            </a:r>
-            <a:r>
-              <a:rPr lang="en-US" dirty="0" err="1"/>
-              <a:t>ArithmeticException</a:t>
-            </a:r>
-            <a:endParaRPr lang="en-US" dirty="0"/>
-          </a:p>
-        </p:txBody>
-      </p:sp>
-    </p:spTree>
-    <p:extLst>
-      <p:ext uri="{BB962C8B-B14F-4D97-AF65-F5344CB8AC3E}">
-        <p14:creationId xmlns:p14="http://schemas.microsoft.com/office/powerpoint/2010/main" val="3026357544"/>
-      </p:ext>
-    </p:extLst>
-  </p:cSld>
-  <p:clrMapOvr>
-    <a:masterClrMapping/>
-  </p:clrMapOvr>
-</p:sld>
-</file>
-
-<file path=ppt/slides/slide3.xml><?xml version="1.0" encoding="utf-8"?>
-<p:sld xmlns:a="http://schemas.openxmlformats.org/drawingml/2006/main" xmlns:r="http://schemas.openxmlformats.org/officeDocument/2006/relationships" xmlns:p="http://schemas.openxmlformats.org/presentationml/2006/main">
-  <p:cSld>
-    <p:spTree>
-      <p:nvGrpSpPr>
-        <p:cNvPr id="1" name=""/>
-        <p:cNvGrpSpPr/>
-        <p:nvPr/>
-      </p:nvGrpSpPr>
-      <p:grpSpPr>
-        <a:xfrm>
-          <a:off x="0" y="0"/>
-          <a:ext cx="0" cy="0"/>
-          <a:chOff x="0" y="0"/>
-          <a:chExt cx="0" cy="0"/>
-        </a:xfrm>
-      </p:grpSpPr>
-      <p:pic>
-        <p:nvPicPr>
-          <p:cNvPr id="2" name="Picture 1"/>
-          <p:cNvPicPr>
-            <a:picLocks noChangeAspect="1"/>
-          </p:cNvPicPr>
-          <p:nvPr/>
-        </p:nvPicPr>
-        <p:blipFill>
-          <a:blip r:embed="rId2"/>
-          <a:stretch>
-            <a:fillRect/>
-          </a:stretch>
-        </p:blipFill>
-        <p:spPr>
-          <a:xfrm>
-            <a:off x="2671921" y="952575"/>
-            <a:ext cx="6014879" cy="3351068"/>
-          </a:xfrm>
-          <a:prstGeom prst="rect">
-            <a:avLst/>
-          </a:prstGeom>
-        </p:spPr>
-      </p:pic>
-      <p:pic>
-        <p:nvPicPr>
-          <p:cNvPr id="3" name="Picture 2"/>
-          <p:cNvPicPr>
-            <a:picLocks noChangeAspect="1"/>
-          </p:cNvPicPr>
-          <p:nvPr/>
-        </p:nvPicPr>
-        <p:blipFill>
-          <a:blip r:embed="rId3"/>
-          <a:stretch>
-            <a:fillRect/>
-          </a:stretch>
-        </p:blipFill>
-        <p:spPr>
-          <a:xfrm>
-            <a:off x="2163796" y="4224130"/>
-            <a:ext cx="6731346" cy="1998395"/>
-          </a:xfrm>
-          <a:prstGeom prst="rect">
-            <a:avLst/>
-          </a:prstGeom>
-        </p:spPr>
-      </p:pic>
-    </p:spTree>
-    <p:extLst>
-      <p:ext uri="{BB962C8B-B14F-4D97-AF65-F5344CB8AC3E}">
-        <p14:creationId xmlns:p14="http://schemas.microsoft.com/office/powerpoint/2010/main" val="2779375047"/>
-      </p:ext>
-    </p:extLst>
-  </p:cSld>
-  <p:clrMapOvr>
-    <a:masterClrMapping/>
-  </p:clrMapOvr>
-  <p:timing>
-    <p:tnLst>
-      <p:par>
-        <p:cTn id="1" dur="indefinite" restart="never" nodeType="tmRoot"/>
-      </p:par>
-    </p:tnLst>
-  </p:timing>
-</p:sld>
-</file>
-
-<file path=ppt/slides/slide4.xml><?xml version="1.0" encoding="utf-8"?>
-<p:sld xmlns:a="http://schemas.openxmlformats.org/drawingml/2006/main" xmlns:r="http://schemas.openxmlformats.org/officeDocument/2006/relationships" xmlns:p="http://schemas.openxmlformats.org/presentationml/2006/main">
-  <p:cSld>
-    <p:spTree>
-      <p:nvGrpSpPr>
-        <p:cNvPr id="1" name=""/>
-        <p:cNvGrpSpPr/>
-        <p:nvPr/>
-      </p:nvGrpSpPr>
-      <p:grpSpPr>
-        <a:xfrm>
-          <a:off x="0" y="0"/>
-          <a:ext cx="0" cy="0"/>
-          <a:chOff x="0" y="0"/>
-          <a:chExt cx="0" cy="0"/>
-        </a:xfrm>
-      </p:grpSpPr>
-      <p:pic>
-        <p:nvPicPr>
-          <p:cNvPr id="2" name="Picture 1"/>
-          <p:cNvPicPr>
-            <a:picLocks noChangeAspect="1"/>
-          </p:cNvPicPr>
-          <p:nvPr/>
-        </p:nvPicPr>
-        <p:blipFill>
-          <a:blip r:embed="rId2">
-            <a:extLst>
-              <a:ext uri="{28A0092B-C50C-407E-A947-70E740481C1C}">
-                <a14:useLocalDpi xmlns:a14="http://schemas.microsoft.com/office/drawing/2010/main" val="0"/>
-              </a:ext>
-            </a:extLst>
-          </a:blip>
-          <a:stretch>
-            <a:fillRect/>
-          </a:stretch>
-        </p:blipFill>
-        <p:spPr>
-          <a:xfrm>
-            <a:off x="2560948" y="1043708"/>
-            <a:ext cx="7070103" cy="5814291"/>
-          </a:xfrm>
-          <a:prstGeom prst="rect">
-            <a:avLst/>
-          </a:prstGeom>
-        </p:spPr>
-      </p:pic>
-    </p:spTree>
-    <p:extLst>
-      <p:ext uri="{BB962C8B-B14F-4D97-AF65-F5344CB8AC3E}">
-        <p14:creationId xmlns:p14="http://schemas.microsoft.com/office/powerpoint/2010/main" val="1138458336"/>
-      </p:ext>
-    </p:extLst>
-  </p:cSld>
-  <p:clrMapOvr>
-    <a:masterClrMapping/>
-  </p:clrMapOvr>
-  <p:timing>
-    <p:tnLst>
-      <p:par>
-        <p:cTn id="1" dur="indefinite" restart="never" nodeType="tmRoot"/>
-      </p:par>
-    </p:tnLst>
-  </p:timing>
-</p:sld>
-</file>
-
-<file path=ppt/slides/slide5.xml><?xml version="1.0" encoding="utf-8"?>
-<p:sld xmlns:a="http://schemas.openxmlformats.org/drawingml/2006/main" xmlns:r="http://schemas.openxmlformats.org/officeDocument/2006/relationships" xmlns:p="http://schemas.openxmlformats.org/presentationml/2006/main">
-  <p:cSld>
-    <p:spTree>
-      <p:nvGrpSpPr>
-        <p:cNvPr id="1" name=""/>
-        <p:cNvGrpSpPr/>
-        <p:nvPr/>
-      </p:nvGrpSpPr>
-      <p:grpSpPr>
-        <a:xfrm>
-          <a:off x="0" y="0"/>
-          <a:ext cx="0" cy="0"/>
-          <a:chOff x="0" y="0"/>
-          <a:chExt cx="0" cy="0"/>
-        </a:xfrm>
-      </p:grpSpPr>
-      <p:sp>
-        <p:nvSpPr>
-          <p:cNvPr id="2" name="Rectangle 1"/>
-          <p:cNvSpPr/>
-          <p:nvPr/>
-        </p:nvSpPr>
-        <p:spPr>
-          <a:xfrm>
-            <a:off x="848787" y="1276989"/>
+            <a:off x="639618" y="1452480"/>
             <a:ext cx="4657044" cy="369332"/>
           </a:xfrm>
           <a:prstGeom prst="rect">
@@ -6939,9 +6121,18 @@
                     <a:lstStyle/>
                     <a:p>
                       <a:r>
-                        <a:rPr lang="en-US"/>
-                        <a:t>OutOfMemoryError, StackOverflowError</a:t>
+                        <a:rPr lang="en-US" dirty="0" err="1"/>
+                        <a:t>OutOfMemoryError</a:t>
                       </a:r>
+                      <a:r>
+                        <a:rPr lang="en-US" dirty="0"/>
+                        <a:t>, </a:t>
+                      </a:r>
+                      <a:r>
+                        <a:rPr lang="en-US" dirty="0" err="1"/>
+                        <a:t>StackOverflowError</a:t>
+                      </a:r>
+                      <a:endParaRPr lang="en-US" dirty="0"/>
                     </a:p>
                   </a:txBody>
                   <a:tcPr anchor="ctr">
@@ -7175,17 +6366,10 @@
   <p:clrMapOvr>
     <a:masterClrMapping/>
   </p:clrMapOvr>
-  <p:timing>
-    <p:tnLst>
-      <p:par>
-        <p:cTn id="1" dur="indefinite" restart="never" nodeType="tmRoot"/>
-      </p:par>
-    </p:tnLst>
-  </p:timing>
 </p:sld>
 </file>
 
-<file path=ppt/slides/slide6.xml><?xml version="1.0" encoding="utf-8"?>
+<file path=ppt/slides/slide11.xml><?xml version="1.0" encoding="utf-8"?>
 <p:sld xmlns:a="http://schemas.openxmlformats.org/drawingml/2006/main" xmlns:r="http://schemas.openxmlformats.org/officeDocument/2006/relationships" xmlns:p="http://schemas.openxmlformats.org/presentationml/2006/main">
   <p:cSld>
     <p:spTree>
@@ -7366,7 +6550,7 @@
 </p:sld>
 </file>
 
-<file path=ppt/slides/slide7.xml><?xml version="1.0" encoding="utf-8"?>
+<file path=ppt/slides/slide12.xml><?xml version="1.0" encoding="utf-8"?>
 <p:sld xmlns:a="http://schemas.openxmlformats.org/drawingml/2006/main" xmlns:r="http://schemas.openxmlformats.org/officeDocument/2006/relationships" xmlns:p="http://schemas.openxmlformats.org/presentationml/2006/main">
   <p:cSld>
     <p:spTree>
@@ -7521,6 +6705,2132 @@
 </p:sld>
 </file>
 
+<file path=ppt/slides/slide13.xml><?xml version="1.0" encoding="utf-8"?>
+<p:sld xmlns:a="http://schemas.openxmlformats.org/drawingml/2006/main" xmlns:r="http://schemas.openxmlformats.org/officeDocument/2006/relationships" xmlns:p="http://schemas.openxmlformats.org/presentationml/2006/main">
+  <p:cSld>
+    <p:spTree>
+      <p:nvGrpSpPr>
+        <p:cNvPr id="1" name=""/>
+        <p:cNvGrpSpPr/>
+        <p:nvPr/>
+      </p:nvGrpSpPr>
+      <p:grpSpPr>
+        <a:xfrm>
+          <a:off x="0" y="0"/>
+          <a:ext cx="0" cy="0"/>
+          <a:chOff x="0" y="0"/>
+          <a:chExt cx="0" cy="0"/>
+        </a:xfrm>
+      </p:grpSpPr>
+      <p:sp>
+        <p:nvSpPr>
+          <p:cNvPr id="3" name="Rectangle 2"/>
+          <p:cNvSpPr/>
+          <p:nvPr/>
+        </p:nvSpPr>
+        <p:spPr>
+          <a:xfrm>
+            <a:off x="794326" y="1295508"/>
+            <a:ext cx="10945091" cy="1754326"/>
+          </a:xfrm>
+          <a:prstGeom prst="rect">
+            <a:avLst/>
+          </a:prstGeom>
+        </p:spPr>
+        <p:txBody>
+          <a:bodyPr wrap="square">
+            <a:spAutoFit/>
+          </a:bodyPr>
+          <a:lstStyle/>
+          <a:p>
+            <a:r>
+              <a:rPr lang="en-US" b="1" dirty="0"/>
+              <a:t>Why Child Exception First, Parent Last</a:t>
+            </a:r>
+          </a:p>
+          <a:p>
+            <a:pPr>
+              <a:buFont typeface="Arial" panose="020B0604020202020204" pitchFamily="34" charset="0"/>
+              <a:buChar char="•"/>
+            </a:pPr>
+            <a:r>
+              <a:rPr lang="en-US" dirty="0"/>
+              <a:t>Java matches exceptions from </a:t>
+            </a:r>
+            <a:r>
+              <a:rPr lang="en-US" b="1" dirty="0"/>
+              <a:t>top to bottom</a:t>
+            </a:r>
+            <a:r>
+              <a:rPr lang="en-US" dirty="0"/>
+              <a:t>.</a:t>
+            </a:r>
+          </a:p>
+          <a:p>
+            <a:pPr>
+              <a:buFont typeface="Arial" panose="020B0604020202020204" pitchFamily="34" charset="0"/>
+              <a:buChar char="•"/>
+            </a:pPr>
+            <a:r>
+              <a:rPr lang="en-US" dirty="0"/>
+              <a:t>When the parent class (Exception) comes </a:t>
+            </a:r>
+            <a:r>
+              <a:rPr lang="en-US" b="1" dirty="0"/>
+              <a:t>before</a:t>
+            </a:r>
+            <a:r>
+              <a:rPr lang="en-US" dirty="0"/>
+              <a:t> the child classes, the child catch blocks become </a:t>
+            </a:r>
+            <a:r>
+              <a:rPr lang="en-US" b="1" dirty="0"/>
+              <a:t>unreachable</a:t>
+            </a:r>
+            <a:r>
+              <a:rPr lang="en-US" dirty="0"/>
+              <a:t>, and this results in a </a:t>
+            </a:r>
+            <a:r>
+              <a:rPr lang="en-US" b="1" dirty="0"/>
+              <a:t>compile-time error</a:t>
+            </a:r>
+            <a:r>
+              <a:rPr lang="en-US" dirty="0"/>
+              <a:t>.</a:t>
+            </a:r>
+          </a:p>
+          <a:p>
+            <a:pPr>
+              <a:buFont typeface="Arial" panose="020B0604020202020204" pitchFamily="34" charset="0"/>
+              <a:buChar char="•"/>
+            </a:pPr>
+            <a:r>
+              <a:rPr lang="en-US" b="1" dirty="0"/>
+              <a:t>Correct Order:</a:t>
+            </a:r>
+            <a:r>
+              <a:rPr lang="en-US" dirty="0"/>
+              <a:t> Write the more </a:t>
+            </a:r>
+            <a:r>
+              <a:rPr lang="en-US" b="1" dirty="0"/>
+              <a:t>specific exceptions first</a:t>
+            </a:r>
+            <a:r>
+              <a:rPr lang="en-US" dirty="0"/>
+              <a:t>, and the </a:t>
+            </a:r>
+            <a:r>
+              <a:rPr lang="en-US" b="1" dirty="0"/>
+              <a:t>general one (Exception)</a:t>
+            </a:r>
+            <a:r>
+              <a:rPr lang="en-US" dirty="0"/>
+              <a:t> at the end.</a:t>
+            </a:r>
+          </a:p>
+        </p:txBody>
+      </p:sp>
+      <p:sp>
+        <p:nvSpPr>
+          <p:cNvPr id="4" name="Rectangle 3"/>
+          <p:cNvSpPr/>
+          <p:nvPr/>
+        </p:nvSpPr>
+        <p:spPr>
+          <a:xfrm>
+            <a:off x="332508" y="3253034"/>
+            <a:ext cx="3956532" cy="369332"/>
+          </a:xfrm>
+          <a:prstGeom prst="rect">
+            <a:avLst/>
+          </a:prstGeom>
+        </p:spPr>
+        <p:txBody>
+          <a:bodyPr wrap="none">
+            <a:spAutoFit/>
+          </a:bodyPr>
+          <a:lstStyle/>
+          <a:p>
+            <a:r>
+              <a:rPr lang="en-US" dirty="0"/>
+              <a:t>Wrong Order (Compile-Time Error)</a:t>
+            </a:r>
+          </a:p>
+        </p:txBody>
+      </p:sp>
+      <p:pic>
+        <p:nvPicPr>
+          <p:cNvPr id="5" name="Picture 4"/>
+          <p:cNvPicPr>
+            <a:picLocks noChangeAspect="1"/>
+          </p:cNvPicPr>
+          <p:nvPr/>
+        </p:nvPicPr>
+        <p:blipFill>
+          <a:blip r:embed="rId2"/>
+          <a:stretch>
+            <a:fillRect/>
+          </a:stretch>
+        </p:blipFill>
+        <p:spPr>
+          <a:xfrm>
+            <a:off x="428521" y="3855108"/>
+            <a:ext cx="4540643" cy="2499509"/>
+          </a:xfrm>
+          <a:prstGeom prst="rect">
+            <a:avLst/>
+          </a:prstGeom>
+        </p:spPr>
+      </p:pic>
+      <p:sp>
+        <p:nvSpPr>
+          <p:cNvPr id="6" name="Rectangle 5"/>
+          <p:cNvSpPr/>
+          <p:nvPr/>
+        </p:nvSpPr>
+        <p:spPr>
+          <a:xfrm>
+            <a:off x="6130498" y="3253034"/>
+            <a:ext cx="4382931" cy="369332"/>
+          </a:xfrm>
+          <a:prstGeom prst="rect">
+            <a:avLst/>
+          </a:prstGeom>
+        </p:spPr>
+        <p:txBody>
+          <a:bodyPr wrap="none">
+            <a:spAutoFit/>
+          </a:bodyPr>
+          <a:lstStyle/>
+          <a:p>
+            <a:r>
+              <a:rPr lang="en-US" dirty="0"/>
+              <a:t>Correct Order (Child First, Parent Last)</a:t>
+            </a:r>
+          </a:p>
+        </p:txBody>
+      </p:sp>
+      <p:pic>
+        <p:nvPicPr>
+          <p:cNvPr id="7" name="Picture 6"/>
+          <p:cNvPicPr>
+            <a:picLocks noChangeAspect="1"/>
+          </p:cNvPicPr>
+          <p:nvPr/>
+        </p:nvPicPr>
+        <p:blipFill>
+          <a:blip r:embed="rId3"/>
+          <a:stretch>
+            <a:fillRect/>
+          </a:stretch>
+        </p:blipFill>
+        <p:spPr>
+          <a:xfrm>
+            <a:off x="5945191" y="3855108"/>
+            <a:ext cx="5473981" cy="2176237"/>
+          </a:xfrm>
+          <a:prstGeom prst="rect">
+            <a:avLst/>
+          </a:prstGeom>
+        </p:spPr>
+      </p:pic>
+    </p:spTree>
+    <p:extLst>
+      <p:ext uri="{BB962C8B-B14F-4D97-AF65-F5344CB8AC3E}">
+        <p14:creationId xmlns:p14="http://schemas.microsoft.com/office/powerpoint/2010/main" val="1690502601"/>
+      </p:ext>
+    </p:extLst>
+  </p:cSld>
+  <p:clrMapOvr>
+    <a:masterClrMapping/>
+  </p:clrMapOvr>
+</p:sld>
+</file>
+
+<file path=ppt/slides/slide14.xml><?xml version="1.0" encoding="utf-8"?>
+<p:sld xmlns:a="http://schemas.openxmlformats.org/drawingml/2006/main" xmlns:r="http://schemas.openxmlformats.org/officeDocument/2006/relationships" xmlns:p="http://schemas.openxmlformats.org/presentationml/2006/main">
+  <p:cSld>
+    <p:spTree>
+      <p:nvGrpSpPr>
+        <p:cNvPr id="1" name=""/>
+        <p:cNvGrpSpPr/>
+        <p:nvPr/>
+      </p:nvGrpSpPr>
+      <p:grpSpPr>
+        <a:xfrm>
+          <a:off x="0" y="0"/>
+          <a:ext cx="0" cy="0"/>
+          <a:chOff x="0" y="0"/>
+          <a:chExt cx="0" cy="0"/>
+        </a:xfrm>
+      </p:grpSpPr>
+      <p:sp>
+        <p:nvSpPr>
+          <p:cNvPr id="2" name="Rectangle 1"/>
+          <p:cNvSpPr/>
+          <p:nvPr/>
+        </p:nvSpPr>
+        <p:spPr>
+          <a:xfrm>
+            <a:off x="581890" y="1304881"/>
+            <a:ext cx="10196945" cy="923330"/>
+          </a:xfrm>
+          <a:prstGeom prst="rect">
+            <a:avLst/>
+          </a:prstGeom>
+        </p:spPr>
+        <p:txBody>
+          <a:bodyPr wrap="square">
+            <a:spAutoFit/>
+          </a:bodyPr>
+          <a:lstStyle/>
+          <a:p>
+            <a:r>
+              <a:rPr lang="en-US" b="1" dirty="0"/>
+              <a:t>finally block</a:t>
+            </a:r>
+          </a:p>
+          <a:p>
+            <a:r>
+              <a:rPr lang="en-US" b="1" dirty="0"/>
+              <a:t>Used for:</a:t>
+            </a:r>
+            <a:r>
+              <a:rPr lang="en-US" dirty="0"/>
+              <a:t> Code that should always run, whether an exception occurs or not.</a:t>
+            </a:r>
+            <a:br>
+              <a:rPr lang="en-US" dirty="0"/>
+            </a:br>
+            <a:r>
+              <a:rPr lang="en-US" b="1" dirty="0"/>
+              <a:t>Rules:</a:t>
+            </a:r>
+            <a:r>
+              <a:rPr lang="en-US" dirty="0"/>
+              <a:t> Used for cleanup like closing files or releasing resources.</a:t>
+            </a:r>
+          </a:p>
+        </p:txBody>
+      </p:sp>
+      <p:pic>
+        <p:nvPicPr>
+          <p:cNvPr id="3" name="Picture 2"/>
+          <p:cNvPicPr>
+            <a:picLocks noChangeAspect="1"/>
+          </p:cNvPicPr>
+          <p:nvPr/>
+        </p:nvPicPr>
+        <p:blipFill>
+          <a:blip r:embed="rId2"/>
+          <a:stretch>
+            <a:fillRect/>
+          </a:stretch>
+        </p:blipFill>
+        <p:spPr>
+          <a:xfrm>
+            <a:off x="2834281" y="2360111"/>
+            <a:ext cx="5911964" cy="3190944"/>
+          </a:xfrm>
+          <a:prstGeom prst="rect">
+            <a:avLst/>
+          </a:prstGeom>
+        </p:spPr>
+      </p:pic>
+    </p:spTree>
+    <p:extLst>
+      <p:ext uri="{BB962C8B-B14F-4D97-AF65-F5344CB8AC3E}">
+        <p14:creationId xmlns:p14="http://schemas.microsoft.com/office/powerpoint/2010/main" val="1816483564"/>
+      </p:ext>
+    </p:extLst>
+  </p:cSld>
+  <p:clrMapOvr>
+    <a:masterClrMapping/>
+  </p:clrMapOvr>
+</p:sld>
+</file>
+
+<file path=ppt/slides/slide15.xml><?xml version="1.0" encoding="utf-8"?>
+<p:sld xmlns:a="http://schemas.openxmlformats.org/drawingml/2006/main" xmlns:r="http://schemas.openxmlformats.org/officeDocument/2006/relationships" xmlns:p="http://schemas.openxmlformats.org/presentationml/2006/main">
+  <p:cSld>
+    <p:spTree>
+      <p:nvGrpSpPr>
+        <p:cNvPr id="1" name=""/>
+        <p:cNvGrpSpPr/>
+        <p:nvPr/>
+      </p:nvGrpSpPr>
+      <p:grpSpPr>
+        <a:xfrm>
+          <a:off x="0" y="0"/>
+          <a:ext cx="0" cy="0"/>
+          <a:chOff x="0" y="0"/>
+          <a:chExt cx="0" cy="0"/>
+        </a:xfrm>
+      </p:grpSpPr>
+      <p:sp>
+        <p:nvSpPr>
+          <p:cNvPr id="2" name="Rectangle 1"/>
+          <p:cNvSpPr/>
+          <p:nvPr/>
+        </p:nvSpPr>
+        <p:spPr>
+          <a:xfrm>
+            <a:off x="554181" y="1351063"/>
+            <a:ext cx="10529455" cy="923330"/>
+          </a:xfrm>
+          <a:prstGeom prst="rect">
+            <a:avLst/>
+          </a:prstGeom>
+        </p:spPr>
+        <p:txBody>
+          <a:bodyPr wrap="square">
+            <a:spAutoFit/>
+          </a:bodyPr>
+          <a:lstStyle/>
+          <a:p>
+            <a:r>
+              <a:rPr lang="en-US" b="1" dirty="0"/>
+              <a:t>throw keyword</a:t>
+            </a:r>
+          </a:p>
+          <a:p>
+            <a:r>
+              <a:rPr lang="en-US" b="1" dirty="0"/>
+              <a:t>Used for:</a:t>
+            </a:r>
+            <a:r>
+              <a:rPr lang="en-US" dirty="0"/>
+              <a:t> Manually throwing an exception (built-in or custom).</a:t>
+            </a:r>
+            <a:br>
+              <a:rPr lang="en-US" dirty="0"/>
+            </a:br>
+            <a:r>
+              <a:rPr lang="en-US" b="1" dirty="0"/>
+              <a:t>Rules:</a:t>
+            </a:r>
+            <a:r>
+              <a:rPr lang="en-US" dirty="0"/>
+              <a:t> Only one exception can be thrown at a time using throw.</a:t>
+            </a:r>
+          </a:p>
+        </p:txBody>
+      </p:sp>
+      <p:pic>
+        <p:nvPicPr>
+          <p:cNvPr id="3" name="Picture 2"/>
+          <p:cNvPicPr>
+            <a:picLocks noChangeAspect="1"/>
+          </p:cNvPicPr>
+          <p:nvPr/>
+        </p:nvPicPr>
+        <p:blipFill>
+          <a:blip r:embed="rId2"/>
+          <a:stretch>
+            <a:fillRect/>
+          </a:stretch>
+        </p:blipFill>
+        <p:spPr>
+          <a:xfrm>
+            <a:off x="2213694" y="2739389"/>
+            <a:ext cx="6926084" cy="2719302"/>
+          </a:xfrm>
+          <a:prstGeom prst="rect">
+            <a:avLst/>
+          </a:prstGeom>
+        </p:spPr>
+      </p:pic>
+    </p:spTree>
+    <p:extLst>
+      <p:ext uri="{BB962C8B-B14F-4D97-AF65-F5344CB8AC3E}">
+        <p14:creationId xmlns:p14="http://schemas.microsoft.com/office/powerpoint/2010/main" val="2765831023"/>
+      </p:ext>
+    </p:extLst>
+  </p:cSld>
+  <p:clrMapOvr>
+    <a:masterClrMapping/>
+  </p:clrMapOvr>
+</p:sld>
+</file>
+
+<file path=ppt/slides/slide16.xml><?xml version="1.0" encoding="utf-8"?>
+<p:sld xmlns:a="http://schemas.openxmlformats.org/drawingml/2006/main" xmlns:r="http://schemas.openxmlformats.org/officeDocument/2006/relationships" xmlns:p="http://schemas.openxmlformats.org/presentationml/2006/main">
+  <p:cSld>
+    <p:spTree>
+      <p:nvGrpSpPr>
+        <p:cNvPr id="1" name=""/>
+        <p:cNvGrpSpPr/>
+        <p:nvPr/>
+      </p:nvGrpSpPr>
+      <p:grpSpPr>
+        <a:xfrm>
+          <a:off x="0" y="0"/>
+          <a:ext cx="0" cy="0"/>
+          <a:chOff x="0" y="0"/>
+          <a:chExt cx="0" cy="0"/>
+        </a:xfrm>
+      </p:grpSpPr>
+      <p:sp>
+        <p:nvSpPr>
+          <p:cNvPr id="2" name="Rectangle 1"/>
+          <p:cNvSpPr/>
+          <p:nvPr/>
+        </p:nvSpPr>
+        <p:spPr>
+          <a:xfrm>
+            <a:off x="581891" y="1360300"/>
+            <a:ext cx="10815782" cy="923330"/>
+          </a:xfrm>
+          <a:prstGeom prst="rect">
+            <a:avLst/>
+          </a:prstGeom>
+        </p:spPr>
+        <p:txBody>
+          <a:bodyPr wrap="square">
+            <a:spAutoFit/>
+          </a:bodyPr>
+          <a:lstStyle/>
+          <a:p>
+            <a:r>
+              <a:rPr lang="en-US" b="1" dirty="0"/>
+              <a:t>throws keyword</a:t>
+            </a:r>
+          </a:p>
+          <a:p>
+            <a:r>
+              <a:rPr lang="en-US" b="1" dirty="0"/>
+              <a:t>Used for:</a:t>
+            </a:r>
+            <a:r>
+              <a:rPr lang="en-US" dirty="0"/>
+              <a:t> Declaring exceptions a method might throw.</a:t>
+            </a:r>
+            <a:br>
+              <a:rPr lang="en-US" dirty="0"/>
+            </a:br>
+            <a:r>
+              <a:rPr lang="en-US" b="1" dirty="0"/>
+              <a:t>Rules:</a:t>
+            </a:r>
+            <a:r>
+              <a:rPr lang="en-US" dirty="0"/>
+              <a:t> Helps inform the caller to handle the exception.</a:t>
+            </a:r>
+          </a:p>
+        </p:txBody>
+      </p:sp>
+      <p:pic>
+        <p:nvPicPr>
+          <p:cNvPr id="3" name="Picture 2"/>
+          <p:cNvPicPr>
+            <a:picLocks noChangeAspect="1"/>
+          </p:cNvPicPr>
+          <p:nvPr/>
+        </p:nvPicPr>
+        <p:blipFill>
+          <a:blip r:embed="rId2"/>
+          <a:stretch>
+            <a:fillRect/>
+          </a:stretch>
+        </p:blipFill>
+        <p:spPr>
+          <a:xfrm>
+            <a:off x="2689953" y="2493158"/>
+            <a:ext cx="5842817" cy="3547424"/>
+          </a:xfrm>
+          <a:prstGeom prst="rect">
+            <a:avLst/>
+          </a:prstGeom>
+        </p:spPr>
+      </p:pic>
+    </p:spTree>
+    <p:extLst>
+      <p:ext uri="{BB962C8B-B14F-4D97-AF65-F5344CB8AC3E}">
+        <p14:creationId xmlns:p14="http://schemas.microsoft.com/office/powerpoint/2010/main" val="3081668947"/>
+      </p:ext>
+    </p:extLst>
+  </p:cSld>
+  <p:clrMapOvr>
+    <a:masterClrMapping/>
+  </p:clrMapOvr>
+</p:sld>
+</file>
+
+<file path=ppt/slides/slide17.xml><?xml version="1.0" encoding="utf-8"?>
+<p:sld xmlns:a="http://schemas.openxmlformats.org/drawingml/2006/main" xmlns:r="http://schemas.openxmlformats.org/officeDocument/2006/relationships" xmlns:p="http://schemas.openxmlformats.org/presentationml/2006/main">
+  <p:cSld>
+    <p:spTree>
+      <p:nvGrpSpPr>
+        <p:cNvPr id="1" name=""/>
+        <p:cNvGrpSpPr/>
+        <p:nvPr/>
+      </p:nvGrpSpPr>
+      <p:grpSpPr>
+        <a:xfrm>
+          <a:off x="0" y="0"/>
+          <a:ext cx="0" cy="0"/>
+          <a:chOff x="0" y="0"/>
+          <a:chExt cx="0" cy="0"/>
+        </a:xfrm>
+      </p:grpSpPr>
+      <p:sp>
+        <p:nvSpPr>
+          <p:cNvPr id="2" name="Rectangle 1"/>
+          <p:cNvSpPr/>
+          <p:nvPr/>
+        </p:nvSpPr>
+        <p:spPr>
+          <a:xfrm>
+            <a:off x="498765" y="1443841"/>
+            <a:ext cx="11222180" cy="2308324"/>
+          </a:xfrm>
+          <a:prstGeom prst="rect">
+            <a:avLst/>
+          </a:prstGeom>
+        </p:spPr>
+        <p:txBody>
+          <a:bodyPr wrap="square">
+            <a:spAutoFit/>
+          </a:bodyPr>
+          <a:lstStyle/>
+          <a:p>
+            <a:r>
+              <a:rPr lang="en-US" b="1" dirty="0"/>
+              <a:t>Custom User-Defined Exception in Java</a:t>
+            </a:r>
+            <a:br>
+              <a:rPr lang="en-US" dirty="0"/>
+            </a:br>
+            <a:r>
+              <a:rPr lang="en-US" dirty="0"/>
+              <a:t>Java allows you to create your own exception classes by extending the built-in Exception class (or any of its subclasses). This helps you represent application-specific errors clearly.</a:t>
+            </a:r>
+          </a:p>
+          <a:p>
+            <a:pPr>
+              <a:buFont typeface="Arial" panose="020B0604020202020204" pitchFamily="34" charset="0"/>
+              <a:buChar char="•"/>
+            </a:pPr>
+            <a:r>
+              <a:rPr lang="en-US" dirty="0"/>
+              <a:t>Custom exceptions usually extend Exception (checked exceptions) or </a:t>
+            </a:r>
+            <a:r>
+              <a:rPr lang="en-US" dirty="0" err="1"/>
+              <a:t>RuntimeException</a:t>
+            </a:r>
+            <a:r>
+              <a:rPr lang="en-US" dirty="0"/>
+              <a:t> (unchecked exceptions).</a:t>
+            </a:r>
+          </a:p>
+          <a:p>
+            <a:pPr>
+              <a:buFont typeface="Arial" panose="020B0604020202020204" pitchFamily="34" charset="0"/>
+              <a:buChar char="•"/>
+            </a:pPr>
+            <a:r>
+              <a:rPr lang="en-US" dirty="0"/>
+              <a:t>You can add constructors and custom messages.</a:t>
+            </a:r>
+          </a:p>
+          <a:p>
+            <a:pPr>
+              <a:buFont typeface="Arial" panose="020B0604020202020204" pitchFamily="34" charset="0"/>
+              <a:buChar char="•"/>
+            </a:pPr>
+            <a:r>
+              <a:rPr lang="en-US" dirty="0"/>
+              <a:t>When your code detects a specific error condition, you throw your custom exception.</a:t>
+            </a:r>
+          </a:p>
+          <a:p>
+            <a:pPr>
+              <a:buFont typeface="Arial" panose="020B0604020202020204" pitchFamily="34" charset="0"/>
+              <a:buChar char="•"/>
+            </a:pPr>
+            <a:r>
+              <a:rPr lang="en-US" dirty="0"/>
+              <a:t>The caller handles it like any other exception using try-catch.</a:t>
+            </a:r>
+          </a:p>
+        </p:txBody>
+      </p:sp>
+      <p:pic>
+        <p:nvPicPr>
+          <p:cNvPr id="4" name="Picture 3"/>
+          <p:cNvPicPr>
+            <a:picLocks noChangeAspect="1"/>
+          </p:cNvPicPr>
+          <p:nvPr/>
+        </p:nvPicPr>
+        <p:blipFill>
+          <a:blip r:embed="rId2"/>
+          <a:stretch>
+            <a:fillRect/>
+          </a:stretch>
+        </p:blipFill>
+        <p:spPr>
+          <a:xfrm>
+            <a:off x="363019" y="4012582"/>
+            <a:ext cx="4978217" cy="2305089"/>
+          </a:xfrm>
+          <a:prstGeom prst="rect">
+            <a:avLst/>
+          </a:prstGeom>
+        </p:spPr>
+      </p:pic>
+      <p:pic>
+        <p:nvPicPr>
+          <p:cNvPr id="5" name="Picture 4"/>
+          <p:cNvPicPr>
+            <a:picLocks noChangeAspect="1"/>
+          </p:cNvPicPr>
+          <p:nvPr/>
+        </p:nvPicPr>
+        <p:blipFill>
+          <a:blip r:embed="rId3"/>
+          <a:stretch>
+            <a:fillRect/>
+          </a:stretch>
+        </p:blipFill>
+        <p:spPr>
+          <a:xfrm>
+            <a:off x="5697544" y="3971017"/>
+            <a:ext cx="5007402" cy="2388218"/>
+          </a:xfrm>
+          <a:prstGeom prst="rect">
+            <a:avLst/>
+          </a:prstGeom>
+        </p:spPr>
+      </p:pic>
+    </p:spTree>
+    <p:extLst>
+      <p:ext uri="{BB962C8B-B14F-4D97-AF65-F5344CB8AC3E}">
+        <p14:creationId xmlns:p14="http://schemas.microsoft.com/office/powerpoint/2010/main" val="2530876225"/>
+      </p:ext>
+    </p:extLst>
+  </p:cSld>
+  <p:clrMapOvr>
+    <a:masterClrMapping/>
+  </p:clrMapOvr>
+</p:sld>
+</file>
+
+<file path=ppt/slides/slide18.xml><?xml version="1.0" encoding="utf-8"?>
+<p:sld xmlns:a="http://schemas.openxmlformats.org/drawingml/2006/main" xmlns:r="http://schemas.openxmlformats.org/officeDocument/2006/relationships" xmlns:p="http://schemas.openxmlformats.org/presentationml/2006/main">
+  <p:cSld>
+    <p:spTree>
+      <p:nvGrpSpPr>
+        <p:cNvPr id="1" name=""/>
+        <p:cNvGrpSpPr/>
+        <p:nvPr/>
+      </p:nvGrpSpPr>
+      <p:grpSpPr>
+        <a:xfrm>
+          <a:off x="0" y="0"/>
+          <a:ext cx="0" cy="0"/>
+          <a:chOff x="0" y="0"/>
+          <a:chExt cx="0" cy="0"/>
+        </a:xfrm>
+      </p:grpSpPr>
+      <p:pic>
+        <p:nvPicPr>
+          <p:cNvPr id="2" name="Picture 1"/>
+          <p:cNvPicPr>
+            <a:picLocks noChangeAspect="1"/>
+          </p:cNvPicPr>
+          <p:nvPr/>
+        </p:nvPicPr>
+        <p:blipFill>
+          <a:blip r:embed="rId2"/>
+          <a:stretch>
+            <a:fillRect/>
+          </a:stretch>
+        </p:blipFill>
+        <p:spPr>
+          <a:xfrm>
+            <a:off x="561543" y="1533474"/>
+            <a:ext cx="5600988" cy="2761435"/>
+          </a:xfrm>
+          <a:prstGeom prst="rect">
+            <a:avLst/>
+          </a:prstGeom>
+        </p:spPr>
+      </p:pic>
+      <p:sp>
+        <p:nvSpPr>
+          <p:cNvPr id="3" name="Rectangle 2"/>
+          <p:cNvSpPr/>
+          <p:nvPr/>
+        </p:nvSpPr>
+        <p:spPr>
+          <a:xfrm>
+            <a:off x="2004290" y="4294909"/>
+            <a:ext cx="7693891" cy="2308324"/>
+          </a:xfrm>
+          <a:prstGeom prst="rect">
+            <a:avLst/>
+          </a:prstGeom>
+        </p:spPr>
+        <p:txBody>
+          <a:bodyPr wrap="square">
+            <a:spAutoFit/>
+          </a:bodyPr>
+          <a:lstStyle/>
+          <a:p>
+            <a:r>
+              <a:rPr lang="en-US" dirty="0"/>
+              <a:t>This code defines a custom exception class named </a:t>
+            </a:r>
+            <a:r>
+              <a:rPr lang="en-US" dirty="0" err="1"/>
+              <a:t>MyException</a:t>
+            </a:r>
+            <a:r>
+              <a:rPr lang="en-US" dirty="0"/>
+              <a:t> without any constructor. The method check throws this exception when the input number is less than zero. In the main method, check is called inside a try block. If the exception occurs, it is caught in the catch block, and a simple message is printed. Since the custom exception has no constructor with a message, no detailed error message is available. This shows that defining a constructor is optional but useful for passing error details.</a:t>
+            </a:r>
+          </a:p>
+        </p:txBody>
+      </p:sp>
+    </p:spTree>
+    <p:extLst>
+      <p:ext uri="{BB962C8B-B14F-4D97-AF65-F5344CB8AC3E}">
+        <p14:creationId xmlns:p14="http://schemas.microsoft.com/office/powerpoint/2010/main" val="3127140088"/>
+      </p:ext>
+    </p:extLst>
+  </p:cSld>
+  <p:clrMapOvr>
+    <a:masterClrMapping/>
+  </p:clrMapOvr>
+</p:sld>
+</file>
+
+<file path=ppt/slides/slide2.xml><?xml version="1.0" encoding="utf-8"?>
+<p:sld xmlns:a="http://schemas.openxmlformats.org/drawingml/2006/main" xmlns:r="http://schemas.openxmlformats.org/officeDocument/2006/relationships" xmlns:p="http://schemas.openxmlformats.org/presentationml/2006/main">
+  <p:cSld>
+    <p:spTree>
+      <p:nvGrpSpPr>
+        <p:cNvPr id="1" name=""/>
+        <p:cNvGrpSpPr/>
+        <p:nvPr/>
+      </p:nvGrpSpPr>
+      <p:grpSpPr>
+        <a:xfrm>
+          <a:off x="0" y="0"/>
+          <a:ext cx="0" cy="0"/>
+          <a:chOff x="0" y="0"/>
+          <a:chExt cx="0" cy="0"/>
+        </a:xfrm>
+      </p:grpSpPr>
+      <p:sp>
+        <p:nvSpPr>
+          <p:cNvPr id="2" name="Rectangle 1"/>
+          <p:cNvSpPr/>
+          <p:nvPr/>
+        </p:nvSpPr>
+        <p:spPr>
+          <a:xfrm>
+            <a:off x="725053" y="1480465"/>
+            <a:ext cx="10741891" cy="646331"/>
+          </a:xfrm>
+          <a:prstGeom prst="rect">
+            <a:avLst/>
+          </a:prstGeom>
+        </p:spPr>
+        <p:txBody>
+          <a:bodyPr wrap="square">
+            <a:spAutoFit/>
+          </a:bodyPr>
+          <a:lstStyle/>
+          <a:p>
+            <a:r>
+              <a:rPr lang="en-US" b="1" dirty="0"/>
+              <a:t>Motivation: Why Exception Handling Matters?</a:t>
+            </a:r>
+          </a:p>
+          <a:p>
+            <a:endParaRPr lang="en-US" b="1" dirty="0"/>
+          </a:p>
+        </p:txBody>
+      </p:sp>
+      <p:sp>
+        <p:nvSpPr>
+          <p:cNvPr id="3" name="Rectangle 1">
+            <a:extLst>
+              <a:ext uri="{FF2B5EF4-FFF2-40B4-BE49-F238E27FC236}">
+                <a16:creationId xmlns:a16="http://schemas.microsoft.com/office/drawing/2014/main" id="{CF39478A-7116-D832-AE5F-D2B8C27227EE}"/>
+              </a:ext>
+            </a:extLst>
+          </p:cNvPr>
+          <p:cNvSpPr>
+            <a:spLocks noChangeArrowheads="1"/>
+          </p:cNvSpPr>
+          <p:nvPr/>
+        </p:nvSpPr>
+        <p:spPr bwMode="auto">
+          <a:xfrm>
+            <a:off x="725053" y="1803630"/>
+            <a:ext cx="11134438" cy="2949525"/>
+          </a:xfrm>
+          <a:prstGeom prst="rect">
+            <a:avLst/>
+          </a:prstGeom>
+          <a:noFill/>
+          <a:ln>
+            <a:noFill/>
+          </a:ln>
+          <a:effectLst/>
+          <a:extLst>
+            <a:ext uri="{909E8E84-426E-40DD-AFC4-6F175D3DCCD1}">
+              <a14:hiddenFill xmlns:a14="http://schemas.microsoft.com/office/drawing/2010/main">
+                <a:solidFill>
+                  <a:schemeClr val="accent1"/>
+                </a:solidFill>
+              </a14:hiddenFill>
+            </a:ext>
+            <a:ext uri="{91240B29-F687-4F45-9708-019B960494DF}">
+              <a14:hiddenLine xmlns:a14="http://schemas.microsoft.com/office/drawing/2010/main" w="9525">
+                <a:solidFill>
+                  <a:schemeClr val="tx1"/>
+                </a:solidFill>
+                <a:miter lim="800000"/>
+                <a:headEnd/>
+                <a:tailEnd/>
+              </a14:hiddenLine>
+            </a:ext>
+            <a:ext uri="{AF507438-7753-43E0-B8FC-AC1667EBCBE1}">
+              <a14:hiddenEffects xmlns:a14="http://schemas.microsoft.com/office/drawing/2010/main">
+                <a:effectLst>
+                  <a:outerShdw dist="35921" dir="2700000" algn="ctr" rotWithShape="0">
+                    <a:schemeClr val="bg2"/>
+                  </a:outerShdw>
+                </a:effectLst>
+              </a14:hiddenEffects>
+            </a:ext>
+          </a:extLst>
+        </p:spPr>
+        <p:txBody>
+          <a:bodyPr vert="horz" wrap="square" lIns="91440" tIns="45720" rIns="91440" bIns="45720" numCol="1" anchor="ctr" anchorCtr="0" compatLnSpc="1">
+            <a:prstTxWarp prst="textNoShape">
+              <a:avLst/>
+            </a:prstTxWarp>
+            <a:spAutoFit/>
+          </a:bodyPr>
+          <a:lstStyle/>
+          <a:p>
+            <a:pPr marL="285750" marR="0" lvl="0" indent="-285750" algn="l" defTabSz="914400" rtl="0" eaLnBrk="0" fontAlgn="base" latinLnBrk="0" hangingPunct="0">
+              <a:lnSpc>
+                <a:spcPct val="150000"/>
+              </a:lnSpc>
+              <a:spcBef>
+                <a:spcPct val="0"/>
+              </a:spcBef>
+              <a:spcAft>
+                <a:spcPct val="0"/>
+              </a:spcAft>
+              <a:buClrTx/>
+              <a:buSzTx/>
+              <a:buFont typeface="Wingdings" panose="05000000000000000000" pitchFamily="2" charset="2"/>
+              <a:buChar char="§"/>
+              <a:tabLst/>
+            </a:pPr>
+            <a:r>
+              <a:rPr kumimoji="0" lang="en-US" altLang="en-US" sz="1800" b="0" i="0" u="none" strike="noStrike" cap="none" normalizeH="0" baseline="0" dirty="0">
+                <a:ln>
+                  <a:noFill/>
+                </a:ln>
+                <a:solidFill>
+                  <a:schemeClr val="tx1"/>
+                </a:solidFill>
+                <a:effectLst/>
+                <a:latin typeface="Arial" panose="020B0604020202020204" pitchFamily="34" charset="0"/>
+              </a:rPr>
+              <a:t>Programs often face abnormal situations during execution</a:t>
+            </a:r>
+          </a:p>
+          <a:p>
+            <a:pPr marL="285750" marR="0" lvl="0" indent="-285750" algn="l" defTabSz="914400" rtl="0" eaLnBrk="0" fontAlgn="base" latinLnBrk="0" hangingPunct="0">
+              <a:lnSpc>
+                <a:spcPct val="150000"/>
+              </a:lnSpc>
+              <a:spcBef>
+                <a:spcPct val="0"/>
+              </a:spcBef>
+              <a:spcAft>
+                <a:spcPct val="0"/>
+              </a:spcAft>
+              <a:buClrTx/>
+              <a:buSzTx/>
+              <a:buFont typeface="Wingdings" panose="05000000000000000000" pitchFamily="2" charset="2"/>
+              <a:buChar char="§"/>
+              <a:tabLst/>
+            </a:pPr>
+            <a:r>
+              <a:rPr kumimoji="0" lang="en-US" altLang="en-US" sz="1800" b="0" i="0" u="none" strike="noStrike" cap="none" normalizeH="0" baseline="0" dirty="0">
+                <a:ln>
+                  <a:noFill/>
+                </a:ln>
+                <a:solidFill>
+                  <a:schemeClr val="tx1"/>
+                </a:solidFill>
+                <a:effectLst/>
+                <a:latin typeface="Arial" panose="020B0604020202020204" pitchFamily="34" charset="0"/>
+              </a:rPr>
+              <a:t>Common causes include:</a:t>
+            </a:r>
+          </a:p>
+          <a:p>
+            <a:pPr marL="742950" lvl="1" indent="-285750" defTabSz="914400" eaLnBrk="0" fontAlgn="base" hangingPunct="0">
+              <a:lnSpc>
+                <a:spcPct val="150000"/>
+              </a:lnSpc>
+              <a:spcBef>
+                <a:spcPct val="0"/>
+              </a:spcBef>
+              <a:spcAft>
+                <a:spcPct val="0"/>
+              </a:spcAft>
+              <a:buFont typeface="Wingdings" panose="05000000000000000000" pitchFamily="2" charset="2"/>
+              <a:buChar char="§"/>
+            </a:pPr>
+            <a:r>
+              <a:rPr kumimoji="0" lang="en-US" altLang="en-US" b="0" i="0" u="none" strike="noStrike" cap="none" normalizeH="0" baseline="0" dirty="0">
+                <a:ln>
+                  <a:noFill/>
+                </a:ln>
+                <a:solidFill>
+                  <a:schemeClr val="tx1"/>
+                </a:solidFill>
+                <a:effectLst/>
+                <a:latin typeface="Arial" panose="020B0604020202020204" pitchFamily="34" charset="0"/>
+              </a:rPr>
+              <a:t>Invalid user input</a:t>
+            </a:r>
+          </a:p>
+          <a:p>
+            <a:pPr marL="742950" lvl="1" indent="-285750" defTabSz="914400" eaLnBrk="0" fontAlgn="base" hangingPunct="0">
+              <a:lnSpc>
+                <a:spcPct val="150000"/>
+              </a:lnSpc>
+              <a:spcBef>
+                <a:spcPct val="0"/>
+              </a:spcBef>
+              <a:spcAft>
+                <a:spcPct val="0"/>
+              </a:spcAft>
+              <a:buFont typeface="Wingdings" panose="05000000000000000000" pitchFamily="2" charset="2"/>
+              <a:buChar char="§"/>
+            </a:pPr>
+            <a:r>
+              <a:rPr kumimoji="0" lang="en-US" altLang="en-US" b="0" i="0" u="none" strike="noStrike" cap="none" normalizeH="0" baseline="0" dirty="0">
+                <a:ln>
+                  <a:noFill/>
+                </a:ln>
+                <a:solidFill>
+                  <a:schemeClr val="tx1"/>
+                </a:solidFill>
+                <a:effectLst/>
+                <a:latin typeface="Arial" panose="020B0604020202020204" pitchFamily="34" charset="0"/>
+              </a:rPr>
+              <a:t>Missing files</a:t>
+            </a:r>
+          </a:p>
+          <a:p>
+            <a:pPr marL="742950" lvl="1" indent="-285750" defTabSz="914400" eaLnBrk="0" fontAlgn="base" hangingPunct="0">
+              <a:lnSpc>
+                <a:spcPct val="150000"/>
+              </a:lnSpc>
+              <a:spcBef>
+                <a:spcPct val="0"/>
+              </a:spcBef>
+              <a:spcAft>
+                <a:spcPct val="0"/>
+              </a:spcAft>
+              <a:buFont typeface="Wingdings" panose="05000000000000000000" pitchFamily="2" charset="2"/>
+              <a:buChar char="§"/>
+            </a:pPr>
+            <a:r>
+              <a:rPr kumimoji="0" lang="en-US" altLang="en-US" b="0" i="0" u="none" strike="noStrike" cap="none" normalizeH="0" baseline="0" dirty="0">
+                <a:ln>
+                  <a:noFill/>
+                </a:ln>
+                <a:solidFill>
+                  <a:schemeClr val="tx1"/>
+                </a:solidFill>
+                <a:effectLst/>
+                <a:latin typeface="Arial" panose="020B0604020202020204" pitchFamily="34" charset="0"/>
+              </a:rPr>
+              <a:t>Network failures</a:t>
+            </a:r>
+          </a:p>
+          <a:p>
+            <a:pPr marL="742950" lvl="1" indent="-285750" defTabSz="914400" eaLnBrk="0" fontAlgn="base" hangingPunct="0">
+              <a:lnSpc>
+                <a:spcPct val="150000"/>
+              </a:lnSpc>
+              <a:spcBef>
+                <a:spcPct val="0"/>
+              </a:spcBef>
+              <a:spcAft>
+                <a:spcPct val="0"/>
+              </a:spcAft>
+              <a:buFont typeface="Wingdings" panose="05000000000000000000" pitchFamily="2" charset="2"/>
+              <a:buChar char="§"/>
+            </a:pPr>
+            <a:r>
+              <a:rPr kumimoji="0" lang="en-US" altLang="en-US" b="0" i="0" u="none" strike="noStrike" cap="none" normalizeH="0" baseline="0" dirty="0">
+                <a:ln>
+                  <a:noFill/>
+                </a:ln>
+                <a:solidFill>
+                  <a:schemeClr val="tx1"/>
+                </a:solidFill>
+                <a:effectLst/>
+                <a:latin typeface="Arial" panose="020B0604020202020204" pitchFamily="34" charset="0"/>
+              </a:rPr>
+              <a:t>Division by zero</a:t>
+            </a:r>
+            <a:endParaRPr lang="en-US" altLang="en-US" dirty="0">
+              <a:latin typeface="Arial" panose="020B0604020202020204" pitchFamily="34" charset="0"/>
+            </a:endParaRPr>
+          </a:p>
+          <a:p>
+            <a:pPr marL="742950" lvl="1" indent="-285750" defTabSz="914400" eaLnBrk="0" fontAlgn="base" hangingPunct="0">
+              <a:lnSpc>
+                <a:spcPct val="150000"/>
+              </a:lnSpc>
+              <a:spcBef>
+                <a:spcPct val="0"/>
+              </a:spcBef>
+              <a:spcAft>
+                <a:spcPct val="0"/>
+              </a:spcAft>
+              <a:buFont typeface="Wingdings" panose="05000000000000000000" pitchFamily="2" charset="2"/>
+              <a:buChar char="§"/>
+            </a:pPr>
+            <a:endParaRPr kumimoji="0" lang="en-US" altLang="en-US" b="0" i="0" u="none" strike="noStrike" cap="none" normalizeH="0" baseline="0" dirty="0">
+              <a:ln>
+                <a:noFill/>
+              </a:ln>
+              <a:solidFill>
+                <a:schemeClr val="tx1"/>
+              </a:solidFill>
+              <a:effectLst/>
+              <a:latin typeface="Arial" panose="020B0604020202020204" pitchFamily="34" charset="0"/>
+            </a:endParaRPr>
+          </a:p>
+        </p:txBody>
+      </p:sp>
+    </p:spTree>
+    <p:extLst>
+      <p:ext uri="{BB962C8B-B14F-4D97-AF65-F5344CB8AC3E}">
+        <p14:creationId xmlns:p14="http://schemas.microsoft.com/office/powerpoint/2010/main" val="3026357544"/>
+      </p:ext>
+    </p:extLst>
+  </p:cSld>
+  <p:clrMapOvr>
+    <a:masterClrMapping/>
+  </p:clrMapOvr>
+</p:sld>
+</file>
+
+<file path=ppt/slides/slide3.xml><?xml version="1.0" encoding="utf-8"?>
+<p:sld xmlns:a="http://schemas.openxmlformats.org/drawingml/2006/main" xmlns:r="http://schemas.openxmlformats.org/officeDocument/2006/relationships" xmlns:p="http://schemas.openxmlformats.org/presentationml/2006/main">
+  <p:cSld>
+    <p:spTree>
+      <p:nvGrpSpPr>
+        <p:cNvPr id="1" name="">
+          <a:extLst>
+            <a:ext uri="{FF2B5EF4-FFF2-40B4-BE49-F238E27FC236}">
+              <a16:creationId xmlns:a16="http://schemas.microsoft.com/office/drawing/2014/main" id="{BE0C9EA2-7B7C-5993-5C55-9247B785A158}"/>
+            </a:ext>
+          </a:extLst>
+        </p:cNvPr>
+        <p:cNvGrpSpPr/>
+        <p:nvPr/>
+      </p:nvGrpSpPr>
+      <p:grpSpPr>
+        <a:xfrm>
+          <a:off x="0" y="0"/>
+          <a:ext cx="0" cy="0"/>
+          <a:chOff x="0" y="0"/>
+          <a:chExt cx="0" cy="0"/>
+        </a:xfrm>
+      </p:grpSpPr>
+      <p:sp>
+        <p:nvSpPr>
+          <p:cNvPr id="2" name="Rectangle 1">
+            <a:extLst>
+              <a:ext uri="{FF2B5EF4-FFF2-40B4-BE49-F238E27FC236}">
+                <a16:creationId xmlns:a16="http://schemas.microsoft.com/office/drawing/2014/main" id="{BCA77A1A-B634-A13D-7461-530E5721F9A4}"/>
+              </a:ext>
+            </a:extLst>
+          </p:cNvPr>
+          <p:cNvSpPr/>
+          <p:nvPr/>
+        </p:nvSpPr>
+        <p:spPr>
+          <a:xfrm>
+            <a:off x="725053" y="1480465"/>
+            <a:ext cx="10741891" cy="646331"/>
+          </a:xfrm>
+          <a:prstGeom prst="rect">
+            <a:avLst/>
+          </a:prstGeom>
+        </p:spPr>
+        <p:txBody>
+          <a:bodyPr wrap="square">
+            <a:spAutoFit/>
+          </a:bodyPr>
+          <a:lstStyle/>
+          <a:p>
+            <a:r>
+              <a:rPr lang="en-US" b="1" dirty="0"/>
+              <a:t>Motivation: Why Exception Handling Matters?</a:t>
+            </a:r>
+          </a:p>
+          <a:p>
+            <a:endParaRPr lang="en-US" b="1" dirty="0"/>
+          </a:p>
+        </p:txBody>
+      </p:sp>
+      <p:sp>
+        <p:nvSpPr>
+          <p:cNvPr id="5" name="Rectangle 2">
+            <a:extLst>
+              <a:ext uri="{FF2B5EF4-FFF2-40B4-BE49-F238E27FC236}">
+                <a16:creationId xmlns:a16="http://schemas.microsoft.com/office/drawing/2014/main" id="{E7C02700-8F67-A1A7-9FDD-E5E669D11333}"/>
+              </a:ext>
+            </a:extLst>
+          </p:cNvPr>
+          <p:cNvSpPr>
+            <a:spLocks noChangeArrowheads="1"/>
+          </p:cNvSpPr>
+          <p:nvPr/>
+        </p:nvSpPr>
+        <p:spPr bwMode="auto">
+          <a:xfrm>
+            <a:off x="725053" y="1982883"/>
+            <a:ext cx="10469420" cy="2949525"/>
+          </a:xfrm>
+          <a:prstGeom prst="rect">
+            <a:avLst/>
+          </a:prstGeom>
+          <a:noFill/>
+          <a:ln>
+            <a:noFill/>
+          </a:ln>
+          <a:effectLst/>
+          <a:extLst>
+            <a:ext uri="{909E8E84-426E-40DD-AFC4-6F175D3DCCD1}">
+              <a14:hiddenFill xmlns:a14="http://schemas.microsoft.com/office/drawing/2010/main">
+                <a:solidFill>
+                  <a:schemeClr val="accent1"/>
+                </a:solidFill>
+              </a14:hiddenFill>
+            </a:ext>
+            <a:ext uri="{91240B29-F687-4F45-9708-019B960494DF}">
+              <a14:hiddenLine xmlns:a14="http://schemas.microsoft.com/office/drawing/2010/main" w="9525">
+                <a:solidFill>
+                  <a:schemeClr val="tx1"/>
+                </a:solidFill>
+                <a:miter lim="800000"/>
+                <a:headEnd/>
+                <a:tailEnd/>
+              </a14:hiddenLine>
+            </a:ext>
+            <a:ext uri="{AF507438-7753-43E0-B8FC-AC1667EBCBE1}">
+              <a14:hiddenEffects xmlns:a14="http://schemas.microsoft.com/office/drawing/2010/main">
+                <a:effectLst>
+                  <a:outerShdw dist="35921" dir="2700000" algn="ctr" rotWithShape="0">
+                    <a:schemeClr val="bg2"/>
+                  </a:outerShdw>
+                </a:effectLst>
+              </a14:hiddenEffects>
+            </a:ext>
+          </a:extLst>
+        </p:spPr>
+        <p:txBody>
+          <a:bodyPr vert="horz" wrap="square" lIns="91440" tIns="45720" rIns="91440" bIns="45720" numCol="1" anchor="ctr" anchorCtr="0" compatLnSpc="1">
+            <a:prstTxWarp prst="textNoShape">
+              <a:avLst/>
+            </a:prstTxWarp>
+            <a:spAutoFit/>
+          </a:bodyPr>
+          <a:lstStyle/>
+          <a:p>
+            <a:pPr marL="285750" marR="0" lvl="0" indent="-285750" algn="l" defTabSz="914400" rtl="0" eaLnBrk="0" fontAlgn="base" latinLnBrk="0" hangingPunct="0">
+              <a:lnSpc>
+                <a:spcPct val="150000"/>
+              </a:lnSpc>
+              <a:spcBef>
+                <a:spcPct val="0"/>
+              </a:spcBef>
+              <a:spcAft>
+                <a:spcPct val="0"/>
+              </a:spcAft>
+              <a:buClrTx/>
+              <a:buSzTx/>
+              <a:buFont typeface="Wingdings" panose="05000000000000000000" pitchFamily="2" charset="2"/>
+              <a:buChar char="§"/>
+              <a:tabLst/>
+            </a:pPr>
+            <a:r>
+              <a:rPr kumimoji="0" lang="en-US" altLang="en-US" sz="1800" b="0" i="0" u="none" strike="noStrike" cap="none" normalizeH="0" baseline="0" dirty="0">
+                <a:ln>
+                  <a:noFill/>
+                </a:ln>
+                <a:solidFill>
+                  <a:schemeClr val="tx1"/>
+                </a:solidFill>
+                <a:effectLst/>
+                <a:latin typeface="Arial" panose="020B0604020202020204" pitchFamily="34" charset="0"/>
+              </a:rPr>
+              <a:t>Without handling, programs may terminate abruptly</a:t>
+            </a:r>
+          </a:p>
+          <a:p>
+            <a:pPr marL="285750" marR="0" lvl="0" indent="-285750" algn="l" defTabSz="914400" rtl="0" eaLnBrk="0" fontAlgn="base" latinLnBrk="0" hangingPunct="0">
+              <a:lnSpc>
+                <a:spcPct val="150000"/>
+              </a:lnSpc>
+              <a:spcBef>
+                <a:spcPct val="0"/>
+              </a:spcBef>
+              <a:spcAft>
+                <a:spcPct val="0"/>
+              </a:spcAft>
+              <a:buClrTx/>
+              <a:buSzTx/>
+              <a:buFont typeface="Wingdings" panose="05000000000000000000" pitchFamily="2" charset="2"/>
+              <a:buChar char="§"/>
+              <a:tabLst/>
+            </a:pPr>
+            <a:r>
+              <a:rPr kumimoji="0" lang="en-US" altLang="en-US" b="0" i="0" u="none" strike="noStrike" cap="none" normalizeH="0" baseline="0" dirty="0">
+                <a:ln>
+                  <a:noFill/>
+                </a:ln>
+                <a:solidFill>
+                  <a:schemeClr val="tx1"/>
+                </a:solidFill>
+                <a:effectLst/>
+                <a:latin typeface="Arial" panose="020B0604020202020204" pitchFamily="34" charset="0"/>
+              </a:rPr>
+              <a:t>Exception handling improves:		</a:t>
+            </a:r>
+          </a:p>
+          <a:p>
+            <a:pPr marL="742950" lvl="1" indent="-285750" defTabSz="914400" eaLnBrk="0" fontAlgn="base" hangingPunct="0">
+              <a:lnSpc>
+                <a:spcPct val="150000"/>
+              </a:lnSpc>
+              <a:spcBef>
+                <a:spcPct val="0"/>
+              </a:spcBef>
+              <a:spcAft>
+                <a:spcPct val="0"/>
+              </a:spcAft>
+              <a:buFont typeface="Wingdings" panose="05000000000000000000" pitchFamily="2" charset="2"/>
+              <a:buChar char="§"/>
+            </a:pPr>
+            <a:r>
+              <a:rPr kumimoji="0" lang="en-US" altLang="en-US" b="0" i="0" u="none" strike="noStrike" cap="none" normalizeH="0" baseline="0" dirty="0">
+                <a:ln>
+                  <a:noFill/>
+                </a:ln>
+                <a:solidFill>
+                  <a:schemeClr val="tx1"/>
+                </a:solidFill>
+                <a:effectLst/>
+                <a:latin typeface="Arial" panose="020B0604020202020204" pitchFamily="34" charset="0"/>
+              </a:rPr>
+              <a:t>Program robustness</a:t>
+            </a:r>
+          </a:p>
+          <a:p>
+            <a:pPr marL="742950" lvl="1" indent="-285750" defTabSz="914400" eaLnBrk="0" fontAlgn="base" hangingPunct="0">
+              <a:lnSpc>
+                <a:spcPct val="150000"/>
+              </a:lnSpc>
+              <a:spcBef>
+                <a:spcPct val="0"/>
+              </a:spcBef>
+              <a:spcAft>
+                <a:spcPct val="0"/>
+              </a:spcAft>
+              <a:buFont typeface="Wingdings" panose="05000000000000000000" pitchFamily="2" charset="2"/>
+              <a:buChar char="§"/>
+            </a:pPr>
+            <a:r>
+              <a:rPr kumimoji="0" lang="en-US" altLang="en-US" b="0" i="0" u="none" strike="noStrike" cap="none" normalizeH="0" baseline="0" dirty="0">
+                <a:ln>
+                  <a:noFill/>
+                </a:ln>
+                <a:solidFill>
+                  <a:schemeClr val="tx1"/>
+                </a:solidFill>
+                <a:effectLst/>
+                <a:latin typeface="Arial" panose="020B0604020202020204" pitchFamily="34" charset="0"/>
+              </a:rPr>
+              <a:t>Maintainability</a:t>
+            </a:r>
+          </a:p>
+          <a:p>
+            <a:pPr marL="742950" lvl="1" indent="-285750" defTabSz="914400" eaLnBrk="0" fontAlgn="base" hangingPunct="0">
+              <a:lnSpc>
+                <a:spcPct val="150000"/>
+              </a:lnSpc>
+              <a:spcBef>
+                <a:spcPct val="0"/>
+              </a:spcBef>
+              <a:spcAft>
+                <a:spcPct val="0"/>
+              </a:spcAft>
+              <a:buFont typeface="Wingdings" panose="05000000000000000000" pitchFamily="2" charset="2"/>
+              <a:buChar char="§"/>
+            </a:pPr>
+            <a:r>
+              <a:rPr kumimoji="0" lang="en-US" altLang="en-US" b="0" i="0" u="none" strike="noStrike" cap="none" normalizeH="0" baseline="0" dirty="0">
+                <a:ln>
+                  <a:noFill/>
+                </a:ln>
+                <a:solidFill>
+                  <a:schemeClr val="tx1"/>
+                </a:solidFill>
+                <a:effectLst/>
+                <a:latin typeface="Arial" panose="020B0604020202020204" pitchFamily="34" charset="0"/>
+              </a:rPr>
+              <a:t>Code readability</a:t>
+            </a:r>
+          </a:p>
+          <a:p>
+            <a:pPr marL="742950" lvl="1" indent="-285750" defTabSz="914400" eaLnBrk="0" fontAlgn="base" hangingPunct="0">
+              <a:lnSpc>
+                <a:spcPct val="150000"/>
+              </a:lnSpc>
+              <a:spcBef>
+                <a:spcPct val="0"/>
+              </a:spcBef>
+              <a:spcAft>
+                <a:spcPct val="0"/>
+              </a:spcAft>
+              <a:buFont typeface="Wingdings" panose="05000000000000000000" pitchFamily="2" charset="2"/>
+              <a:buChar char="§"/>
+            </a:pPr>
+            <a:r>
+              <a:rPr kumimoji="0" lang="en-US" altLang="en-US" b="0" i="0" u="none" strike="noStrike" cap="none" normalizeH="0" baseline="0" dirty="0">
+                <a:ln>
+                  <a:noFill/>
+                </a:ln>
+                <a:solidFill>
+                  <a:schemeClr val="tx1"/>
+                </a:solidFill>
+                <a:effectLst/>
+                <a:latin typeface="Arial" panose="020B0604020202020204" pitchFamily="34" charset="0"/>
+              </a:rPr>
+              <a:t>Separation of normal logic and error-handling logic</a:t>
+            </a:r>
+          </a:p>
+          <a:p>
+            <a:pPr marL="285750" marR="0" lvl="0" indent="-285750" algn="l" defTabSz="914400" rtl="0" eaLnBrk="0" fontAlgn="base" latinLnBrk="0" hangingPunct="0">
+              <a:lnSpc>
+                <a:spcPct val="150000"/>
+              </a:lnSpc>
+              <a:spcBef>
+                <a:spcPct val="0"/>
+              </a:spcBef>
+              <a:spcAft>
+                <a:spcPct val="0"/>
+              </a:spcAft>
+              <a:buClrTx/>
+              <a:buSzTx/>
+              <a:buFont typeface="Wingdings" panose="05000000000000000000" pitchFamily="2" charset="2"/>
+              <a:buChar char="§"/>
+              <a:tabLst/>
+            </a:pPr>
+            <a:endParaRPr kumimoji="0" lang="en-US" altLang="en-US" sz="1800" b="0" i="0" u="none" strike="noStrike" cap="none" normalizeH="0" baseline="0" dirty="0">
+              <a:ln>
+                <a:noFill/>
+              </a:ln>
+              <a:solidFill>
+                <a:schemeClr val="tx1"/>
+              </a:solidFill>
+              <a:effectLst/>
+              <a:latin typeface="Arial" panose="020B0604020202020204" pitchFamily="34" charset="0"/>
+            </a:endParaRPr>
+          </a:p>
+        </p:txBody>
+      </p:sp>
+    </p:spTree>
+    <p:extLst>
+      <p:ext uri="{BB962C8B-B14F-4D97-AF65-F5344CB8AC3E}">
+        <p14:creationId xmlns:p14="http://schemas.microsoft.com/office/powerpoint/2010/main" val="1161443228"/>
+      </p:ext>
+    </p:extLst>
+  </p:cSld>
+  <p:clrMapOvr>
+    <a:masterClrMapping/>
+  </p:clrMapOvr>
+</p:sld>
+</file>
+
+<file path=ppt/slides/slide4.xml><?xml version="1.0" encoding="utf-8"?>
+<p:sld xmlns:a="http://schemas.openxmlformats.org/drawingml/2006/main" xmlns:r="http://schemas.openxmlformats.org/officeDocument/2006/relationships" xmlns:p="http://schemas.openxmlformats.org/presentationml/2006/main">
+  <p:cSld>
+    <p:spTree>
+      <p:nvGrpSpPr>
+        <p:cNvPr id="1" name="">
+          <a:extLst>
+            <a:ext uri="{FF2B5EF4-FFF2-40B4-BE49-F238E27FC236}">
+              <a16:creationId xmlns:a16="http://schemas.microsoft.com/office/drawing/2014/main" id="{F3C2DC42-EFFD-A339-062A-28C97585A510}"/>
+            </a:ext>
+          </a:extLst>
+        </p:cNvPr>
+        <p:cNvGrpSpPr/>
+        <p:nvPr/>
+      </p:nvGrpSpPr>
+      <p:grpSpPr>
+        <a:xfrm>
+          <a:off x="0" y="0"/>
+          <a:ext cx="0" cy="0"/>
+          <a:chOff x="0" y="0"/>
+          <a:chExt cx="0" cy="0"/>
+        </a:xfrm>
+      </p:grpSpPr>
+      <p:sp>
+        <p:nvSpPr>
+          <p:cNvPr id="2" name="Rectangle 1">
+            <a:extLst>
+              <a:ext uri="{FF2B5EF4-FFF2-40B4-BE49-F238E27FC236}">
+                <a16:creationId xmlns:a16="http://schemas.microsoft.com/office/drawing/2014/main" id="{FF348374-5D39-405F-3E55-C1F299C868CF}"/>
+              </a:ext>
+            </a:extLst>
+          </p:cNvPr>
+          <p:cNvSpPr/>
+          <p:nvPr/>
+        </p:nvSpPr>
+        <p:spPr>
+          <a:xfrm>
+            <a:off x="725053" y="1332683"/>
+            <a:ext cx="10741891" cy="4609275"/>
+          </a:xfrm>
+          <a:prstGeom prst="rect">
+            <a:avLst/>
+          </a:prstGeom>
+        </p:spPr>
+        <p:txBody>
+          <a:bodyPr wrap="square">
+            <a:spAutoFit/>
+          </a:bodyPr>
+          <a:lstStyle/>
+          <a:p>
+            <a:pPr>
+              <a:lnSpc>
+                <a:spcPct val="150000"/>
+              </a:lnSpc>
+            </a:pPr>
+            <a:r>
+              <a:rPr lang="en-US" b="1" dirty="0"/>
+              <a:t>What is Exception Handling?</a:t>
+            </a:r>
+          </a:p>
+          <a:p>
+            <a:pPr>
+              <a:lnSpc>
+                <a:spcPct val="150000"/>
+              </a:lnSpc>
+              <a:buFont typeface="Arial" panose="020B0604020202020204" pitchFamily="34" charset="0"/>
+              <a:buChar char="•"/>
+            </a:pPr>
+            <a:r>
+              <a:rPr lang="en-US" dirty="0"/>
+              <a:t>Exception: An event that disrupts the normal flow of the program.</a:t>
+            </a:r>
+          </a:p>
+          <a:p>
+            <a:pPr>
+              <a:lnSpc>
+                <a:spcPct val="150000"/>
+              </a:lnSpc>
+              <a:buFont typeface="Arial" panose="020B0604020202020204" pitchFamily="34" charset="0"/>
+              <a:buChar char="•"/>
+            </a:pPr>
+            <a:r>
+              <a:rPr lang="en-US" dirty="0"/>
+              <a:t>Handling: Mechanism to detect and handle runtime problems.</a:t>
+            </a:r>
+          </a:p>
+          <a:p>
+            <a:pPr>
+              <a:lnSpc>
+                <a:spcPct val="150000"/>
+              </a:lnSpc>
+              <a:buFont typeface="Arial" panose="020B0604020202020204" pitchFamily="34" charset="0"/>
+              <a:buChar char="•"/>
+            </a:pPr>
+            <a:endParaRPr lang="en-US" dirty="0"/>
+          </a:p>
+          <a:p>
+            <a:pPr>
+              <a:lnSpc>
+                <a:spcPct val="150000"/>
+              </a:lnSpc>
+            </a:pPr>
+            <a:r>
+              <a:rPr lang="en-US" dirty="0"/>
+              <a:t>Examples:</a:t>
+            </a:r>
+          </a:p>
+          <a:p>
+            <a:pPr marL="285750" indent="-285750">
+              <a:lnSpc>
+                <a:spcPct val="150000"/>
+              </a:lnSpc>
+              <a:buFont typeface="Arial" panose="020B0604020202020204" pitchFamily="34" charset="0"/>
+              <a:buChar char="•"/>
+            </a:pPr>
+            <a:r>
+              <a:rPr lang="en-US" dirty="0"/>
+              <a:t>Division by zero</a:t>
+            </a:r>
+          </a:p>
+          <a:p>
+            <a:pPr marL="285750" indent="-285750">
+              <a:lnSpc>
+                <a:spcPct val="150000"/>
+              </a:lnSpc>
+              <a:buFont typeface="Arial" panose="020B0604020202020204" pitchFamily="34" charset="0"/>
+              <a:buChar char="•"/>
+            </a:pPr>
+            <a:r>
+              <a:rPr lang="en-US" dirty="0"/>
+              <a:t>Accessing invalid array index</a:t>
+            </a:r>
+          </a:p>
+          <a:p>
+            <a:pPr marL="285750" indent="-285750">
+              <a:lnSpc>
+                <a:spcPct val="150000"/>
+              </a:lnSpc>
+              <a:buFont typeface="Arial" panose="020B0604020202020204" pitchFamily="34" charset="0"/>
+              <a:buChar char="•"/>
+            </a:pPr>
+            <a:r>
+              <a:rPr lang="en-US" dirty="0"/>
+              <a:t>Reading a non-existent file</a:t>
+            </a:r>
+          </a:p>
+          <a:p>
+            <a:pPr>
+              <a:lnSpc>
+                <a:spcPct val="150000"/>
+              </a:lnSpc>
+              <a:buFont typeface="Arial" panose="020B0604020202020204" pitchFamily="34" charset="0"/>
+              <a:buChar char="•"/>
+            </a:pPr>
+            <a:endParaRPr lang="en-US" dirty="0"/>
+          </a:p>
+          <a:p>
+            <a:pPr>
+              <a:lnSpc>
+                <a:spcPct val="150000"/>
+              </a:lnSpc>
+            </a:pPr>
+            <a:endParaRPr lang="en-US" b="1" dirty="0"/>
+          </a:p>
+          <a:p>
+            <a:pPr>
+              <a:lnSpc>
+                <a:spcPct val="150000"/>
+              </a:lnSpc>
+            </a:pPr>
+            <a:r>
+              <a:rPr lang="en-US" b="1" dirty="0"/>
+              <a:t>**Java provides a robust exception handling model using try, catch, throw, throws, and finally.</a:t>
+            </a:r>
+          </a:p>
+        </p:txBody>
+      </p:sp>
+    </p:spTree>
+    <p:extLst>
+      <p:ext uri="{BB962C8B-B14F-4D97-AF65-F5344CB8AC3E}">
+        <p14:creationId xmlns:p14="http://schemas.microsoft.com/office/powerpoint/2010/main" val="538677077"/>
+      </p:ext>
+    </p:extLst>
+  </p:cSld>
+  <p:clrMapOvr>
+    <a:masterClrMapping/>
+  </p:clrMapOvr>
+</p:sld>
+</file>
+
+<file path=ppt/slides/slide5.xml><?xml version="1.0" encoding="utf-8"?>
+<p:sld xmlns:a="http://schemas.openxmlformats.org/drawingml/2006/main" xmlns:r="http://schemas.openxmlformats.org/officeDocument/2006/relationships" xmlns:p="http://schemas.openxmlformats.org/presentationml/2006/main">
+  <p:cSld>
+    <p:spTree>
+      <p:nvGrpSpPr>
+        <p:cNvPr id="1" name="">
+          <a:extLst>
+            <a:ext uri="{FF2B5EF4-FFF2-40B4-BE49-F238E27FC236}">
+              <a16:creationId xmlns:a16="http://schemas.microsoft.com/office/drawing/2014/main" id="{4C957934-79F0-A106-E5C0-6A1438765C88}"/>
+            </a:ext>
+          </a:extLst>
+        </p:cNvPr>
+        <p:cNvGrpSpPr/>
+        <p:nvPr/>
+      </p:nvGrpSpPr>
+      <p:grpSpPr>
+        <a:xfrm>
+          <a:off x="0" y="0"/>
+          <a:ext cx="0" cy="0"/>
+          <a:chOff x="0" y="0"/>
+          <a:chExt cx="0" cy="0"/>
+        </a:xfrm>
+      </p:grpSpPr>
+      <p:sp>
+        <p:nvSpPr>
+          <p:cNvPr id="4" name="Rectangle 3">
+            <a:extLst>
+              <a:ext uri="{FF2B5EF4-FFF2-40B4-BE49-F238E27FC236}">
+                <a16:creationId xmlns:a16="http://schemas.microsoft.com/office/drawing/2014/main" id="{E031A2A5-2C1F-2BCA-2512-EA11E01F58E0}"/>
+              </a:ext>
+            </a:extLst>
+          </p:cNvPr>
+          <p:cNvSpPr/>
+          <p:nvPr/>
+        </p:nvSpPr>
+        <p:spPr>
+          <a:xfrm>
+            <a:off x="854362" y="1813021"/>
+            <a:ext cx="6096000" cy="2948179"/>
+          </a:xfrm>
+          <a:prstGeom prst="rect">
+            <a:avLst/>
+          </a:prstGeom>
+        </p:spPr>
+        <p:txBody>
+          <a:bodyPr>
+            <a:spAutoFit/>
+          </a:bodyPr>
+          <a:lstStyle/>
+          <a:p>
+            <a:pPr>
+              <a:lnSpc>
+                <a:spcPct val="150000"/>
+              </a:lnSpc>
+            </a:pPr>
+            <a:r>
+              <a:rPr lang="en-US" b="1" dirty="0"/>
+              <a:t>Types of Exceptions</a:t>
+            </a:r>
+          </a:p>
+          <a:p>
+            <a:pPr>
+              <a:lnSpc>
+                <a:spcPct val="150000"/>
+              </a:lnSpc>
+              <a:buFont typeface="+mj-lt"/>
+              <a:buAutoNum type="arabicPeriod"/>
+            </a:pPr>
+            <a:r>
+              <a:rPr lang="en-US" dirty="0"/>
+              <a:t>Checked Exception</a:t>
+            </a:r>
+          </a:p>
+          <a:p>
+            <a:pPr marL="742950" lvl="1" indent="-285750">
+              <a:lnSpc>
+                <a:spcPct val="150000"/>
+              </a:lnSpc>
+              <a:buFont typeface="+mj-lt"/>
+              <a:buAutoNum type="arabicPeriod"/>
+            </a:pPr>
+            <a:r>
+              <a:rPr lang="en-US" dirty="0"/>
+              <a:t>Checked at compile time.</a:t>
+            </a:r>
+          </a:p>
+          <a:p>
+            <a:pPr marL="742950" lvl="1" indent="-285750">
+              <a:lnSpc>
+                <a:spcPct val="150000"/>
+              </a:lnSpc>
+              <a:buFont typeface="+mj-lt"/>
+              <a:buAutoNum type="arabicPeriod"/>
+            </a:pPr>
+            <a:r>
+              <a:rPr lang="en-US" dirty="0"/>
+              <a:t>Must be handled using try-catch or declared using throws</a:t>
+            </a:r>
+          </a:p>
+          <a:p>
+            <a:pPr marL="742950" lvl="1" indent="-285750">
+              <a:lnSpc>
+                <a:spcPct val="150000"/>
+              </a:lnSpc>
+              <a:buFont typeface="+mj-lt"/>
+              <a:buAutoNum type="arabicPeriod"/>
+            </a:pPr>
+            <a:r>
+              <a:rPr lang="en-US" dirty="0"/>
+              <a:t>Program will not compile if ignored</a:t>
+            </a:r>
+          </a:p>
+          <a:p>
+            <a:pPr marL="742950" lvl="1" indent="-285750">
+              <a:lnSpc>
+                <a:spcPct val="150000"/>
+              </a:lnSpc>
+              <a:buFont typeface="+mj-lt"/>
+              <a:buAutoNum type="arabicPeriod"/>
+            </a:pPr>
+            <a:r>
+              <a:rPr lang="en-US" dirty="0"/>
+              <a:t>Examples: IOException, </a:t>
+            </a:r>
+            <a:r>
+              <a:rPr lang="en-US" dirty="0" err="1"/>
+              <a:t>SQLException</a:t>
+            </a:r>
+            <a:endParaRPr lang="en-US" dirty="0"/>
+          </a:p>
+        </p:txBody>
+      </p:sp>
+    </p:spTree>
+    <p:extLst>
+      <p:ext uri="{BB962C8B-B14F-4D97-AF65-F5344CB8AC3E}">
+        <p14:creationId xmlns:p14="http://schemas.microsoft.com/office/powerpoint/2010/main" val="1652513263"/>
+      </p:ext>
+    </p:extLst>
+  </p:cSld>
+  <p:clrMapOvr>
+    <a:masterClrMapping/>
+  </p:clrMapOvr>
+</p:sld>
+</file>
+
+<file path=ppt/slides/slide6.xml><?xml version="1.0" encoding="utf-8"?>
+<p:sld xmlns:a="http://schemas.openxmlformats.org/drawingml/2006/main" xmlns:r="http://schemas.openxmlformats.org/officeDocument/2006/relationships" xmlns:p="http://schemas.openxmlformats.org/presentationml/2006/main">
+  <p:cSld>
+    <p:spTree>
+      <p:nvGrpSpPr>
+        <p:cNvPr id="1" name="">
+          <a:extLst>
+            <a:ext uri="{FF2B5EF4-FFF2-40B4-BE49-F238E27FC236}">
+              <a16:creationId xmlns:a16="http://schemas.microsoft.com/office/drawing/2014/main" id="{9B4A8723-7720-5B82-CF93-E4AAFD0D1843}"/>
+            </a:ext>
+          </a:extLst>
+        </p:cNvPr>
+        <p:cNvGrpSpPr/>
+        <p:nvPr/>
+      </p:nvGrpSpPr>
+      <p:grpSpPr>
+        <a:xfrm>
+          <a:off x="0" y="0"/>
+          <a:ext cx="0" cy="0"/>
+          <a:chOff x="0" y="0"/>
+          <a:chExt cx="0" cy="0"/>
+        </a:xfrm>
+      </p:grpSpPr>
+      <p:sp>
+        <p:nvSpPr>
+          <p:cNvPr id="4" name="Rectangle 3">
+            <a:extLst>
+              <a:ext uri="{FF2B5EF4-FFF2-40B4-BE49-F238E27FC236}">
+                <a16:creationId xmlns:a16="http://schemas.microsoft.com/office/drawing/2014/main" id="{D9980B5D-9857-D9CF-7FF3-BCA852D883B6}"/>
+              </a:ext>
+            </a:extLst>
+          </p:cNvPr>
+          <p:cNvSpPr/>
+          <p:nvPr/>
+        </p:nvSpPr>
+        <p:spPr>
+          <a:xfrm>
+            <a:off x="854362" y="1813021"/>
+            <a:ext cx="6096000" cy="2948179"/>
+          </a:xfrm>
+          <a:prstGeom prst="rect">
+            <a:avLst/>
+          </a:prstGeom>
+        </p:spPr>
+        <p:txBody>
+          <a:bodyPr>
+            <a:spAutoFit/>
+          </a:bodyPr>
+          <a:lstStyle/>
+          <a:p>
+            <a:pPr>
+              <a:lnSpc>
+                <a:spcPct val="150000"/>
+              </a:lnSpc>
+            </a:pPr>
+            <a:r>
+              <a:rPr lang="en-US" b="1" dirty="0"/>
+              <a:t>Types of Exceptions</a:t>
+            </a:r>
+            <a:endParaRPr lang="en-US" dirty="0"/>
+          </a:p>
+          <a:p>
+            <a:pPr>
+              <a:lnSpc>
+                <a:spcPct val="150000"/>
+              </a:lnSpc>
+            </a:pPr>
+            <a:r>
+              <a:rPr lang="en-US" dirty="0"/>
+              <a:t>2. Unchecked Exception</a:t>
+            </a:r>
+          </a:p>
+          <a:p>
+            <a:pPr marL="742950" lvl="1" indent="-285750">
+              <a:lnSpc>
+                <a:spcPct val="150000"/>
+              </a:lnSpc>
+              <a:buFont typeface="+mj-lt"/>
+              <a:buAutoNum type="arabicPeriod"/>
+            </a:pPr>
+            <a:r>
+              <a:rPr lang="en-US" dirty="0"/>
+              <a:t>Occur at runtime.</a:t>
+            </a:r>
+          </a:p>
+          <a:p>
+            <a:pPr marL="742950" lvl="1" indent="-285750">
+              <a:lnSpc>
+                <a:spcPct val="150000"/>
+              </a:lnSpc>
+              <a:buFont typeface="+mj-lt"/>
+              <a:buAutoNum type="arabicPeriod"/>
+            </a:pPr>
+            <a:r>
+              <a:rPr lang="en-US" dirty="0"/>
+              <a:t>Not checked at compile time</a:t>
+            </a:r>
+          </a:p>
+          <a:p>
+            <a:pPr marL="742950" lvl="1" indent="-285750">
+              <a:lnSpc>
+                <a:spcPct val="150000"/>
+              </a:lnSpc>
+              <a:buFont typeface="+mj-lt"/>
+              <a:buAutoNum type="arabicPeriod"/>
+            </a:pPr>
+            <a:r>
+              <a:rPr lang="en-US" dirty="0"/>
+              <a:t>Usually caused by programming errors</a:t>
+            </a:r>
+          </a:p>
+          <a:p>
+            <a:pPr marL="742950" lvl="1" indent="-285750">
+              <a:lnSpc>
+                <a:spcPct val="150000"/>
+              </a:lnSpc>
+              <a:buFont typeface="+mj-lt"/>
+              <a:buAutoNum type="arabicPeriod"/>
+            </a:pPr>
+            <a:r>
+              <a:rPr lang="en-US" dirty="0"/>
+              <a:t>Examples: </a:t>
+            </a:r>
+            <a:r>
+              <a:rPr lang="en-US" dirty="0" err="1"/>
+              <a:t>NullPointerException</a:t>
+            </a:r>
+            <a:r>
+              <a:rPr lang="en-US" dirty="0"/>
+              <a:t>, </a:t>
+            </a:r>
+            <a:r>
+              <a:rPr lang="en-US" dirty="0" err="1"/>
+              <a:t>ArithmeticException</a:t>
+            </a:r>
+            <a:endParaRPr lang="en-US" dirty="0"/>
+          </a:p>
+        </p:txBody>
+      </p:sp>
+    </p:spTree>
+    <p:extLst>
+      <p:ext uri="{BB962C8B-B14F-4D97-AF65-F5344CB8AC3E}">
+        <p14:creationId xmlns:p14="http://schemas.microsoft.com/office/powerpoint/2010/main" val="1404127844"/>
+      </p:ext>
+    </p:extLst>
+  </p:cSld>
+  <p:clrMapOvr>
+    <a:masterClrMapping/>
+  </p:clrMapOvr>
+</p:sld>
+</file>
+
+<file path=ppt/slides/slide7.xml><?xml version="1.0" encoding="utf-8"?>
+<p:sld xmlns:a="http://schemas.openxmlformats.org/drawingml/2006/main" xmlns:r="http://schemas.openxmlformats.org/officeDocument/2006/relationships" xmlns:p="http://schemas.openxmlformats.org/presentationml/2006/main">
+  <p:cSld>
+    <p:spTree>
+      <p:nvGrpSpPr>
+        <p:cNvPr id="1" name="">
+          <a:extLst>
+            <a:ext uri="{FF2B5EF4-FFF2-40B4-BE49-F238E27FC236}">
+              <a16:creationId xmlns:a16="http://schemas.microsoft.com/office/drawing/2014/main" id="{8CFD9A20-860D-8C74-20E8-DB8F5BD6A1F5}"/>
+            </a:ext>
+          </a:extLst>
+        </p:cNvPr>
+        <p:cNvGrpSpPr/>
+        <p:nvPr/>
+      </p:nvGrpSpPr>
+      <p:grpSpPr>
+        <a:xfrm>
+          <a:off x="0" y="0"/>
+          <a:ext cx="0" cy="0"/>
+          <a:chOff x="0" y="0"/>
+          <a:chExt cx="0" cy="0"/>
+        </a:xfrm>
+      </p:grpSpPr>
+      <p:sp>
+        <p:nvSpPr>
+          <p:cNvPr id="4" name="Rectangle 3">
+            <a:extLst>
+              <a:ext uri="{FF2B5EF4-FFF2-40B4-BE49-F238E27FC236}">
+                <a16:creationId xmlns:a16="http://schemas.microsoft.com/office/drawing/2014/main" id="{1EF0849F-23A6-3DB0-8F5F-E1F5D56750C0}"/>
+              </a:ext>
+            </a:extLst>
+          </p:cNvPr>
+          <p:cNvSpPr/>
+          <p:nvPr/>
+        </p:nvSpPr>
+        <p:spPr>
+          <a:xfrm>
+            <a:off x="226289" y="1748366"/>
+            <a:ext cx="3274293" cy="2031325"/>
+          </a:xfrm>
+          <a:prstGeom prst="rect">
+            <a:avLst/>
+          </a:prstGeom>
+        </p:spPr>
+        <p:txBody>
+          <a:bodyPr wrap="square">
+            <a:spAutoFit/>
+          </a:bodyPr>
+          <a:lstStyle/>
+          <a:p>
+            <a:r>
+              <a:rPr lang="en-US" b="1" dirty="0"/>
+              <a:t>Error:</a:t>
+            </a:r>
+          </a:p>
+          <a:p>
+            <a:pPr marL="285750" indent="-285750">
+              <a:buFont typeface="Arial" panose="020B0604020202020204" pitchFamily="34" charset="0"/>
+              <a:buChar char="•"/>
+            </a:pPr>
+            <a:r>
+              <a:rPr lang="en-US" dirty="0"/>
+              <a:t>Serious system-level problems</a:t>
+            </a:r>
+          </a:p>
+          <a:p>
+            <a:pPr marL="285750" indent="-285750">
+              <a:buFont typeface="Arial" panose="020B0604020202020204" pitchFamily="34" charset="0"/>
+              <a:buChar char="•"/>
+            </a:pPr>
+            <a:r>
+              <a:rPr lang="en-US" dirty="0"/>
+              <a:t>Not meant to be handled by applications</a:t>
+            </a:r>
+          </a:p>
+          <a:p>
+            <a:pPr marL="285750" indent="-285750">
+              <a:buFont typeface="Arial" panose="020B0604020202020204" pitchFamily="34" charset="0"/>
+              <a:buChar char="•"/>
+            </a:pPr>
+            <a:r>
+              <a:rPr lang="en-US" dirty="0"/>
+              <a:t>Example: </a:t>
+            </a:r>
+            <a:r>
+              <a:rPr lang="en-US" dirty="0" err="1"/>
+              <a:t>OutOfMemoryError</a:t>
+            </a:r>
+            <a:endParaRPr lang="en-US" dirty="0"/>
+          </a:p>
+        </p:txBody>
+      </p:sp>
+      <p:pic>
+        <p:nvPicPr>
+          <p:cNvPr id="3" name="Picture 2" descr="A computer screen shot of a program&#10;&#10;AI-generated content may be incorrect.">
+            <a:extLst>
+              <a:ext uri="{FF2B5EF4-FFF2-40B4-BE49-F238E27FC236}">
+                <a16:creationId xmlns:a16="http://schemas.microsoft.com/office/drawing/2014/main" id="{9D82A048-C99C-D03C-C00C-2D52A3898473}"/>
+              </a:ext>
+            </a:extLst>
+          </p:cNvPr>
+          <p:cNvPicPr>
+            <a:picLocks noChangeAspect="1"/>
+          </p:cNvPicPr>
+          <p:nvPr/>
+        </p:nvPicPr>
+        <p:blipFill>
+          <a:blip r:embed="rId2"/>
+          <a:stretch>
+            <a:fillRect/>
+          </a:stretch>
+        </p:blipFill>
+        <p:spPr>
+          <a:xfrm>
+            <a:off x="3838575" y="1511877"/>
+            <a:ext cx="8353425" cy="4076700"/>
+          </a:xfrm>
+          <a:prstGeom prst="rect">
+            <a:avLst/>
+          </a:prstGeom>
+        </p:spPr>
+      </p:pic>
+      <p:pic>
+        <p:nvPicPr>
+          <p:cNvPr id="6" name="Picture 5" descr="A screen shot of a computer code">
+            <a:extLst>
+              <a:ext uri="{FF2B5EF4-FFF2-40B4-BE49-F238E27FC236}">
+                <a16:creationId xmlns:a16="http://schemas.microsoft.com/office/drawing/2014/main" id="{5C9E3D40-03A0-6E00-1D16-0C6088B6699C}"/>
+              </a:ext>
+            </a:extLst>
+          </p:cNvPr>
+          <p:cNvPicPr>
+            <a:picLocks noChangeAspect="1"/>
+          </p:cNvPicPr>
+          <p:nvPr/>
+        </p:nvPicPr>
+        <p:blipFill>
+          <a:blip r:embed="rId3"/>
+          <a:stretch>
+            <a:fillRect/>
+          </a:stretch>
+        </p:blipFill>
+        <p:spPr>
+          <a:xfrm>
+            <a:off x="0" y="5286375"/>
+            <a:ext cx="7753350" cy="1571625"/>
+          </a:xfrm>
+          <a:prstGeom prst="rect">
+            <a:avLst/>
+          </a:prstGeom>
+        </p:spPr>
+      </p:pic>
+    </p:spTree>
+    <p:extLst>
+      <p:ext uri="{BB962C8B-B14F-4D97-AF65-F5344CB8AC3E}">
+        <p14:creationId xmlns:p14="http://schemas.microsoft.com/office/powerpoint/2010/main" val="3538766963"/>
+      </p:ext>
+    </p:extLst>
+  </p:cSld>
+  <p:clrMapOvr>
+    <a:masterClrMapping/>
+  </p:clrMapOvr>
+</p:sld>
+</file>
+
 <file path=ppt/slides/slide8.xml><?xml version="1.0" encoding="utf-8"?>
 <p:sld xmlns:a="http://schemas.openxmlformats.org/drawingml/2006/main" xmlns:r="http://schemas.openxmlformats.org/officeDocument/2006/relationships" xmlns:p="http://schemas.openxmlformats.org/presentationml/2006/main">
   <p:cSld>
@@ -7538,148 +8848,15 @@
           <a:chExt cx="0" cy="0"/>
         </a:xfrm>
       </p:grpSpPr>
-      <p:sp>
-        <p:nvSpPr>
-          <p:cNvPr id="3" name="Rectangle 2"/>
-          <p:cNvSpPr/>
-          <p:nvPr/>
-        </p:nvSpPr>
-        <p:spPr>
-          <a:xfrm>
-            <a:off x="794326" y="1295508"/>
-            <a:ext cx="10945091" cy="1754326"/>
-          </a:xfrm>
-          <a:prstGeom prst="rect">
-            <a:avLst/>
-          </a:prstGeom>
-        </p:spPr>
-        <p:txBody>
-          <a:bodyPr wrap="square">
-            <a:spAutoFit/>
-          </a:bodyPr>
-          <a:lstStyle/>
-          <a:p>
-            <a:r>
-              <a:rPr lang="en-US" b="1" dirty="0"/>
-              <a:t>Why Child Exception First, Parent Last</a:t>
-            </a:r>
-          </a:p>
-          <a:p>
-            <a:pPr>
-              <a:buFont typeface="Arial" panose="020B0604020202020204" pitchFamily="34" charset="0"/>
-              <a:buChar char="•"/>
-            </a:pPr>
-            <a:r>
-              <a:rPr lang="en-US" dirty="0"/>
-              <a:t>Java matches exceptions from </a:t>
-            </a:r>
-            <a:r>
-              <a:rPr lang="en-US" b="1" dirty="0"/>
-              <a:t>top to bottom</a:t>
-            </a:r>
-            <a:r>
-              <a:rPr lang="en-US" dirty="0" smtClean="0"/>
-              <a:t>.</a:t>
-            </a:r>
-          </a:p>
-          <a:p>
-            <a:pPr>
-              <a:buFont typeface="Arial" panose="020B0604020202020204" pitchFamily="34" charset="0"/>
-              <a:buChar char="•"/>
-            </a:pPr>
-            <a:r>
-              <a:rPr lang="en-US" dirty="0"/>
-              <a:t>When the parent class (Exception) comes </a:t>
-            </a:r>
-            <a:r>
-              <a:rPr lang="en-US" b="1" dirty="0"/>
-              <a:t>before</a:t>
-            </a:r>
-            <a:r>
-              <a:rPr lang="en-US" dirty="0"/>
-              <a:t> the child classes, the child catch blocks become </a:t>
-            </a:r>
-            <a:r>
-              <a:rPr lang="en-US" b="1" dirty="0"/>
-              <a:t>unreachable</a:t>
-            </a:r>
-            <a:r>
-              <a:rPr lang="en-US" dirty="0"/>
-              <a:t>, and this results in a </a:t>
-            </a:r>
-            <a:r>
-              <a:rPr lang="en-US" b="1" dirty="0"/>
-              <a:t>compile-time error</a:t>
-            </a:r>
-            <a:r>
-              <a:rPr lang="en-US" dirty="0"/>
-              <a:t>.</a:t>
-            </a:r>
-            <a:endParaRPr lang="en-US" dirty="0" smtClean="0"/>
-          </a:p>
-          <a:p>
-            <a:pPr>
-              <a:buFont typeface="Arial" panose="020B0604020202020204" pitchFamily="34" charset="0"/>
-              <a:buChar char="•"/>
-            </a:pPr>
-            <a:r>
-              <a:rPr lang="en-US" b="1" dirty="0"/>
-              <a:t>Correct Order:</a:t>
-            </a:r>
-            <a:r>
-              <a:rPr lang="en-US" dirty="0"/>
-              <a:t> Write the more </a:t>
-            </a:r>
-            <a:r>
-              <a:rPr lang="en-US" b="1" dirty="0"/>
-              <a:t>specific exceptions first</a:t>
-            </a:r>
-            <a:r>
-              <a:rPr lang="en-US" dirty="0"/>
-              <a:t>, and the </a:t>
-            </a:r>
-            <a:r>
-              <a:rPr lang="en-US" b="1" dirty="0"/>
-              <a:t>general one (Exception)</a:t>
-            </a:r>
-            <a:r>
-              <a:rPr lang="en-US" dirty="0"/>
-              <a:t> at the end.</a:t>
-            </a:r>
-          </a:p>
-        </p:txBody>
-      </p:sp>
-      <p:sp>
-        <p:nvSpPr>
-          <p:cNvPr id="4" name="Rectangle 3"/>
-          <p:cNvSpPr/>
-          <p:nvPr/>
-        </p:nvSpPr>
-        <p:spPr>
-          <a:xfrm>
-            <a:off x="332508" y="3253034"/>
-            <a:ext cx="3956532" cy="369332"/>
-          </a:xfrm>
-          <a:prstGeom prst="rect">
-            <a:avLst/>
-          </a:prstGeom>
-        </p:spPr>
-        <p:txBody>
-          <a:bodyPr wrap="none">
-            <a:spAutoFit/>
-          </a:bodyPr>
-          <a:lstStyle/>
-          <a:p>
-            <a:r>
-              <a:rPr lang="en-US" dirty="0"/>
-              <a:t>Wrong Order (Compile-Time Error)</a:t>
-            </a:r>
-          </a:p>
-        </p:txBody>
-      </p:sp>
       <p:pic>
         <p:nvPicPr>
-          <p:cNvPr id="5" name="Picture 4"/>
+          <p:cNvPr id="5" name="Picture 4" descr="A screenshot of a computer program&#10;&#10;AI-generated content may be incorrect.">
+            <a:extLst>
+              <a:ext uri="{FF2B5EF4-FFF2-40B4-BE49-F238E27FC236}">
+                <a16:creationId xmlns:a16="http://schemas.microsoft.com/office/drawing/2014/main" id="{7AC9E4B1-0001-5D96-F54D-8C631F216DD2}"/>
+              </a:ext>
+            </a:extLst>
+          </p:cNvPr>
           <p:cNvPicPr>
             <a:picLocks noChangeAspect="1"/>
           </p:cNvPicPr>
@@ -7693,45 +8870,23 @@
         </p:blipFill>
         <p:spPr>
           <a:xfrm>
-            <a:off x="428521" y="3855108"/>
-            <a:ext cx="4540643" cy="2499509"/>
+            <a:off x="2892879" y="1109455"/>
+            <a:ext cx="5524500" cy="3114675"/>
           </a:xfrm>
           <a:prstGeom prst="rect">
             <a:avLst/>
           </a:prstGeom>
         </p:spPr>
       </p:pic>
-      <p:sp>
-        <p:nvSpPr>
-          <p:cNvPr id="6" name="Rectangle 5"/>
-          <p:cNvSpPr/>
-          <p:nvPr/>
-        </p:nvSpPr>
-        <p:spPr>
-          <a:xfrm>
-            <a:off x="6130498" y="3253034"/>
-            <a:ext cx="4382931" cy="369332"/>
-          </a:xfrm>
-          <a:prstGeom prst="rect">
-            <a:avLst/>
-          </a:prstGeom>
-        </p:spPr>
-        <p:txBody>
-          <a:bodyPr wrap="none">
-            <a:spAutoFit/>
-          </a:bodyPr>
-          <a:lstStyle/>
-          <a:p>
-            <a:r>
-              <a:rPr lang="en-US" dirty="0"/>
-              <a:t>Correct Order (Child First, Parent Last)</a:t>
-            </a:r>
-          </a:p>
-        </p:txBody>
-      </p:sp>
       <p:pic>
         <p:nvPicPr>
-          <p:cNvPr id="7" name="Picture 6"/>
+          <p:cNvPr id="7" name="Picture 6" descr="A screenshot of a computer&#10;&#10;AI-generated content may be incorrect.">
+            <a:extLst>
+              <a:ext uri="{FF2B5EF4-FFF2-40B4-BE49-F238E27FC236}">
+                <a16:creationId xmlns:a16="http://schemas.microsoft.com/office/drawing/2014/main" id="{013FD842-080A-7566-2FDF-084CE8982984}"/>
+              </a:ext>
+            </a:extLst>
+          </p:cNvPr>
           <p:cNvPicPr>
             <a:picLocks noChangeAspect="1"/>
           </p:cNvPicPr>
@@ -7745,18 +8900,60 @@
         </p:blipFill>
         <p:spPr>
           <a:xfrm>
-            <a:off x="5945191" y="3855108"/>
-            <a:ext cx="5473981" cy="2176237"/>
+            <a:off x="2892879" y="4816248"/>
+            <a:ext cx="7181850" cy="1438275"/>
           </a:xfrm>
           <a:prstGeom prst="rect">
             <a:avLst/>
           </a:prstGeom>
         </p:spPr>
       </p:pic>
+      <p:sp>
+        <p:nvSpPr>
+          <p:cNvPr id="9" name="TextBox 8">
+            <a:extLst>
+              <a:ext uri="{FF2B5EF4-FFF2-40B4-BE49-F238E27FC236}">
+                <a16:creationId xmlns:a16="http://schemas.microsoft.com/office/drawing/2014/main" id="{53D8CEE2-1EAD-4799-4C9B-A10755197FB8}"/>
+              </a:ext>
+            </a:extLst>
+          </p:cNvPr>
+          <p:cNvSpPr txBox="1"/>
+          <p:nvPr/>
+        </p:nvSpPr>
+        <p:spPr>
+          <a:xfrm>
+            <a:off x="249382" y="1925843"/>
+            <a:ext cx="6096000" cy="646331"/>
+          </a:xfrm>
+          <a:prstGeom prst="rect">
+            <a:avLst/>
+          </a:prstGeom>
+          <a:noFill/>
+        </p:spPr>
+        <p:txBody>
+          <a:bodyPr wrap="square">
+            <a:spAutoFit/>
+          </a:bodyPr>
+          <a:lstStyle/>
+          <a:p>
+            <a:r>
+              <a:rPr lang="en-US" b="1" dirty="0" err="1"/>
+              <a:t>ArithmeticException</a:t>
+            </a:r>
+            <a:endParaRPr lang="en-US" b="1" dirty="0"/>
+          </a:p>
+          <a:p>
+            <a:r>
+              <a:rPr lang="en-US" dirty="0"/>
+              <a:t>Division by zero</a:t>
+            </a:r>
+          </a:p>
+        </p:txBody>
+      </p:sp>
     </p:spTree>
     <p:extLst>
       <p:ext uri="{BB962C8B-B14F-4D97-AF65-F5344CB8AC3E}">
-        <p14:creationId xmlns:p14="http://schemas.microsoft.com/office/powerpoint/2010/main" val="1690502601"/>
+        <p14:creationId xmlns:p14="http://schemas.microsoft.com/office/powerpoint/2010/main" val="2779375047"/>
       </p:ext>
     </p:extLst>
   </p:cSld>
@@ -7783,73 +8980,30 @@
           <a:chExt cx="0" cy="0"/>
         </a:xfrm>
       </p:grpSpPr>
-      <p:sp>
-        <p:nvSpPr>
-          <p:cNvPr id="2" name="Rectangle 1"/>
-          <p:cNvSpPr/>
-          <p:nvPr/>
-        </p:nvSpPr>
-        <p:spPr>
-          <a:xfrm>
-            <a:off x="581890" y="1304881"/>
-            <a:ext cx="10196945" cy="923330"/>
-          </a:xfrm>
-          <a:prstGeom prst="rect">
-            <a:avLst/>
-          </a:prstGeom>
-        </p:spPr>
-        <p:txBody>
-          <a:bodyPr wrap="square">
-            <a:spAutoFit/>
-          </a:bodyPr>
-          <a:lstStyle/>
-          <a:p>
-            <a:r>
-              <a:rPr lang="en-US" b="1" dirty="0"/>
-              <a:t>finally block</a:t>
-            </a:r>
-          </a:p>
-          <a:p>
-            <a:r>
-              <a:rPr lang="en-US" b="1" dirty="0"/>
-              <a:t>Used for:</a:t>
-            </a:r>
-            <a:r>
-              <a:rPr lang="en-US" dirty="0"/>
-              <a:t> Code that should always run, whether an exception occurs or not.</a:t>
-            </a:r>
-            <a:br>
-              <a:rPr lang="en-US" dirty="0"/>
-            </a:br>
-            <a:r>
-              <a:rPr lang="en-US" b="1" dirty="0"/>
-              <a:t>Rules:</a:t>
-            </a:r>
-            <a:r>
-              <a:rPr lang="en-US" dirty="0"/>
-              <a:t> Used for cleanup like closing files or releasing resources.</a:t>
-            </a:r>
-          </a:p>
-        </p:txBody>
-      </p:sp>
       <p:pic>
         <p:nvPicPr>
-          <p:cNvPr id="3" name="Picture 2"/>
+          <p:cNvPr id="2" name="Picture 1"/>
           <p:cNvPicPr>
             <a:picLocks noChangeAspect="1"/>
           </p:cNvPicPr>
           <p:nvPr/>
         </p:nvPicPr>
         <p:blipFill>
-          <a:blip r:embed="rId2"/>
+          <a:blip r:embed="rId2">
+            <a:extLst>
+              <a:ext uri="{28A0092B-C50C-407E-A947-70E740481C1C}">
+                <a14:useLocalDpi xmlns:a14="http://schemas.microsoft.com/office/drawing/2010/main" val="0"/>
+              </a:ext>
+            </a:extLst>
+          </a:blip>
           <a:stretch>
             <a:fillRect/>
           </a:stretch>
         </p:blipFill>
         <p:spPr>
           <a:xfrm>
-            <a:off x="2834281" y="2360111"/>
-            <a:ext cx="5911964" cy="3190944"/>
+            <a:off x="2560948" y="1043708"/>
+            <a:ext cx="7070103" cy="5814291"/>
           </a:xfrm>
           <a:prstGeom prst="rect">
             <a:avLst/>
@@ -7859,7 +9013,7 @@
     </p:spTree>
     <p:extLst>
       <p:ext uri="{BB962C8B-B14F-4D97-AF65-F5344CB8AC3E}">
-        <p14:creationId xmlns:p14="http://schemas.microsoft.com/office/powerpoint/2010/main" val="1816483564"/>
+        <p14:creationId xmlns:p14="http://schemas.microsoft.com/office/powerpoint/2010/main" val="1138458336"/>
       </p:ext>
     </p:extLst>
   </p:cSld>
